--- a/workshops/EST-Napoli_Innovation_Festival/PRG32_Breakout_assembly.pptx
+++ b/workshops/EST-Napoli_Innovation_Festival/PRG32_Breakout_assembly.pptx
@@ -165,7 +165,7 @@
   <p:extLst>
     <p:ext uri="{521415D9-36F7-43E2-AB2F-B90AF26B5E84}">
       <p14:sectionLst xmlns:p14="http://schemas.microsoft.com/office/powerpoint/2010/main">
-        <p14:section name="Opening" id="{3fbcafb1-0a21-6909-b711-9dea88f64ad4}">
+        <p14:section name="Opening" id="{cca76686-76ed-0345-e2a2-f39139c156b4}">
           <p14:sldIdLst>
             <p14:sldId id="256"/>
             <p14:sldId id="257"/>
@@ -173,7 +173,7 @@
             <p14:sldId id="259"/>
           </p14:sldIdLst>
         </p14:section>
-        <p14:section name="L'idea" id="{fee6b7bc-a0de-d919-7793-b2e3cfe36f82}">
+        <p14:section name="L'idea" id="{9aae961f-9f40-b0fc-85d7-bd72deff5435}">
           <p14:sldIdLst>
             <p14:sldId id="260"/>
             <p14:sldId id="261"/>
@@ -185,7 +185,7 @@
             <p14:sldId id="267"/>
           </p14:sldIdLst>
         </p14:section>
-        <p14:section name="La piattaforma PRG32" id="{66f746b6-caee-1b71-c5e5-bd3081725d36}">
+        <p14:section name="La piattaforma PRG32" id="{5053f537-f57c-564c-1b49-0fc9cc8f9f72}">
           <p14:sldIdLst>
             <p14:sldId id="268"/>
             <p14:sldId id="269"/>
@@ -197,7 +197,7 @@
             <p14:sldId id="275"/>
           </p14:sldIdLst>
         </p14:section>
-        <p14:section name="Il ciclo init, update, draw" id="{4e4b6f6d-b4eb-d4c1-d62b-8d85459e4c9f}">
+        <p14:section name="Il ciclo init, update, draw" id="{02d44deb-ddd7-b4d9-da0e-878c02e9e251}">
           <p14:sldIdLst>
             <p14:sldId id="276"/>
             <p14:sldId id="277"/>
@@ -210,7 +210,7 @@
             <p14:sldId id="284"/>
           </p14:sldIdLst>
         </p14:section>
-        <p14:section name="Breakout in assembly" id="{2f36bf2a-e487-3c16-b478-c07660073cd5}">
+        <p14:section name="Breakout in assembly" id="{c2373ff5-f8e7-987a-a86c-11aae436ce60}">
           <p14:sldIdLst>
             <p14:sldId id="285"/>
             <p14:sldId id="286"/>
@@ -239,7 +239,7 @@
             <p14:sldId id="309"/>
           </p14:sldIdLst>
         </p14:section>
-        <p14:section name="Sfide finali" id="{d0885a56-b9de-6f15-9e71-183842d3f8fc}">
+        <p14:section name="Sfide finali" id="{cc4e97ba-7485-5c16-bf4a-c7331be8e976}">
           <p14:sldIdLst>
             <p14:sldId id="310"/>
             <p14:sldId id="311"/>
@@ -247,7 +247,7 @@
             <p14:sldId id="313"/>
           </p14:sldIdLst>
         </p14:section>
-        <p14:section name="Closing" id="{f6eed2bb-c155-ccaf-8a8d-6d193ced5521}">
+        <p14:section name="Closing" id="{e4efe323-2cb9-8ff3-788b-482a81ffc88e}">
           <p14:sldIdLst>
             <p14:sldId id="314"/>
           </p14:sldIdLst>
@@ -12341,7 +12341,7 @@
               <a:buNone/>
             </a:pPr>
             <a:r>
-              <a:rPr lang="en-US" sz="1022" dirty="0">
+              <a:rPr lang="en-US" sz="1398" dirty="0">
                 <a:solidFill>
                   <a:srgbClr val="5B6B78"/>
                 </a:solidFill>
@@ -12351,7 +12351,7 @@
               </a:rPr>
               <a:t>+0</a:t>
             </a:r>
-            <a:endParaRPr lang="en-US" sz="1022" dirty="0"/>
+            <a:endParaRPr lang="en-US" sz="1398" dirty="0"/>
           </a:p>
         </p:txBody>
       </p:sp>
@@ -12386,7 +12386,7 @@
               <a:buNone/>
             </a:pPr>
             <a:r>
-              <a:rPr lang="en-US" sz="1222" b="1" dirty="0">
+              <a:rPr lang="en-US" sz="1598" b="1" dirty="0">
                 <a:solidFill>
                   <a:srgbClr val="FFFFFF"/>
                 </a:solidFill>
@@ -12396,7 +12396,7 @@
               </a:rPr>
               <a:t>PRG2</a:t>
             </a:r>
-            <a:endParaRPr lang="en-US" sz="1222" dirty="0"/>
+            <a:endParaRPr lang="en-US" sz="1598" dirty="0"/>
           </a:p>
         </p:txBody>
       </p:sp>
@@ -12425,7 +12425,7 @@
               <a:buNone/>
             </a:pPr>
             <a:r>
-              <a:rPr lang="en-US" sz="1022" dirty="0">
+              <a:rPr lang="en-US" sz="1398" dirty="0">
                 <a:solidFill>
                   <a:srgbClr val="5B6B78"/>
                 </a:solidFill>
@@ -12435,7 +12435,7 @@
               </a:rPr>
               <a:t>4 byte</a:t>
             </a:r>
-            <a:endParaRPr lang="en-US" sz="1022" dirty="0"/>
+            <a:endParaRPr lang="en-US" sz="1398" dirty="0"/>
           </a:p>
         </p:txBody>
       </p:sp>
@@ -12464,7 +12464,7 @@
               <a:buNone/>
             </a:pPr>
             <a:r>
-              <a:rPr lang="en-US" sz="1222" dirty="0">
+              <a:rPr lang="en-US" sz="1598" dirty="0">
                 <a:solidFill>
                   <a:srgbClr val="1B2530"/>
                 </a:solidFill>
@@ -12474,7 +12474,7 @@
               </a:rPr>
               <a:t>firma: "sono una cartuccia PRG32"</a:t>
             </a:r>
-            <a:endParaRPr lang="en-US" sz="1222" dirty="0"/>
+            <a:endParaRPr lang="en-US" sz="1598" dirty="0"/>
           </a:p>
         </p:txBody>
       </p:sp>
@@ -12503,7 +12503,7 @@
               <a:buNone/>
             </a:pPr>
             <a:r>
-              <a:rPr lang="en-US" sz="1022" dirty="0">
+              <a:rPr lang="en-US" sz="1398" dirty="0">
                 <a:solidFill>
                   <a:srgbClr val="5B6B78"/>
                 </a:solidFill>
@@ -12513,7 +12513,7 @@
               </a:rPr>
               <a:t>+4</a:t>
             </a:r>
-            <a:endParaRPr lang="en-US" sz="1022" dirty="0"/>
+            <a:endParaRPr lang="en-US" sz="1398" dirty="0"/>
           </a:p>
         </p:txBody>
       </p:sp>
@@ -12548,7 +12548,7 @@
               <a:buNone/>
             </a:pPr>
             <a:r>
-              <a:rPr lang="en-US" sz="1222" b="1" dirty="0">
+              <a:rPr lang="en-US" sz="1598" b="1" dirty="0">
                 <a:solidFill>
                   <a:srgbClr val="FFFFFF"/>
                 </a:solidFill>
@@ -12558,7 +12558,7 @@
               </a:rPr>
               <a:t>versione ABI</a:t>
             </a:r>
-            <a:endParaRPr lang="en-US" sz="1222" dirty="0"/>
+            <a:endParaRPr lang="en-US" sz="1598" dirty="0"/>
           </a:p>
         </p:txBody>
       </p:sp>
@@ -12587,7 +12587,7 @@
               <a:buNone/>
             </a:pPr>
             <a:r>
-              <a:rPr lang="en-US" sz="1022" dirty="0">
+              <a:rPr lang="en-US" sz="1398" dirty="0">
                 <a:solidFill>
                   <a:srgbClr val="5B6B78"/>
                 </a:solidFill>
@@ -12597,7 +12597,7 @@
               </a:rPr>
               <a:t>4 byte</a:t>
             </a:r>
-            <a:endParaRPr lang="en-US" sz="1022" dirty="0"/>
+            <a:endParaRPr lang="en-US" sz="1398" dirty="0"/>
           </a:p>
         </p:txBody>
       </p:sp>
@@ -12626,7 +12626,7 @@
               <a:buNone/>
             </a:pPr>
             <a:r>
-              <a:rPr lang="en-US" sz="1222" dirty="0">
+              <a:rPr lang="en-US" sz="1598" dirty="0">
                 <a:solidFill>
                   <a:srgbClr val="1B2530"/>
                 </a:solidFill>
@@ -12636,7 +12636,7 @@
               </a:rPr>
               <a:t>quale tabella di funzioni si aspetta</a:t>
             </a:r>
-            <a:endParaRPr lang="en-US" sz="1222" dirty="0"/>
+            <a:endParaRPr lang="en-US" sz="1598" dirty="0"/>
           </a:p>
         </p:txBody>
       </p:sp>
@@ -12665,7 +12665,7 @@
               <a:buNone/>
             </a:pPr>
             <a:r>
-              <a:rPr lang="en-US" sz="1022" dirty="0">
+              <a:rPr lang="en-US" sz="1398" dirty="0">
                 <a:solidFill>
                   <a:srgbClr val="5B6B78"/>
                 </a:solidFill>
@@ -12675,7 +12675,7 @@
               </a:rPr>
               <a:t>+8</a:t>
             </a:r>
-            <a:endParaRPr lang="en-US" sz="1022" dirty="0"/>
+            <a:endParaRPr lang="en-US" sz="1398" dirty="0"/>
           </a:p>
         </p:txBody>
       </p:sp>
@@ -12710,7 +12710,7 @@
               <a:buNone/>
             </a:pPr>
             <a:r>
-              <a:rPr lang="en-US" sz="1222" b="1" dirty="0">
+              <a:rPr lang="en-US" sz="1598" b="1" dirty="0">
                 <a:solidFill>
                   <a:srgbClr val="FFFFFF"/>
                 </a:solidFill>
@@ -12720,7 +12720,7 @@
               </a:rPr>
               <a:t>dimensioni, indirizzo</a:t>
             </a:r>
-            <a:endParaRPr lang="en-US" sz="1222" dirty="0"/>
+            <a:endParaRPr lang="en-US" sz="1598" dirty="0"/>
           </a:p>
         </p:txBody>
       </p:sp>
@@ -12749,7 +12749,7 @@
               <a:buNone/>
             </a:pPr>
             <a:r>
-              <a:rPr lang="en-US" sz="1022" dirty="0">
+              <a:rPr lang="en-US" sz="1398" dirty="0">
                 <a:solidFill>
                   <a:srgbClr val="5B6B78"/>
                 </a:solidFill>
@@ -12759,7 +12759,7 @@
               </a:rPr>
               <a:t>16 byte</a:t>
             </a:r>
-            <a:endParaRPr lang="en-US" sz="1022" dirty="0"/>
+            <a:endParaRPr lang="en-US" sz="1398" dirty="0"/>
           </a:p>
         </p:txBody>
       </p:sp>
@@ -12788,7 +12788,7 @@
               <a:buNone/>
             </a:pPr>
             <a:r>
-              <a:rPr lang="en-US" sz="1222" dirty="0">
+              <a:rPr lang="en-US" sz="1598" dirty="0">
                 <a:solidFill>
                   <a:srgbClr val="1B2530"/>
                 </a:solidFill>
@@ -12798,7 +12798,7 @@
               </a:rPr>
               <a:t>dove caricare il codice e quanto è grande</a:t>
             </a:r>
-            <a:endParaRPr lang="en-US" sz="1222" dirty="0"/>
+            <a:endParaRPr lang="en-US" sz="1598" dirty="0"/>
           </a:p>
         </p:txBody>
       </p:sp>
@@ -12827,7 +12827,7 @@
               <a:buNone/>
             </a:pPr>
             <a:r>
-              <a:rPr lang="en-US" sz="1022" dirty="0">
+              <a:rPr lang="en-US" sz="1398" dirty="0">
                 <a:solidFill>
                   <a:srgbClr val="5B6B78"/>
                 </a:solidFill>
@@ -12837,7 +12837,7 @@
               </a:rPr>
               <a:t>+24</a:t>
             </a:r>
-            <a:endParaRPr lang="en-US" sz="1022" dirty="0"/>
+            <a:endParaRPr lang="en-US" sz="1398" dirty="0"/>
           </a:p>
         </p:txBody>
       </p:sp>
@@ -12872,7 +12872,7 @@
               <a:buNone/>
             </a:pPr>
             <a:r>
-              <a:rPr lang="en-US" sz="1222" b="1" dirty="0">
+              <a:rPr lang="en-US" sz="1598" b="1" dirty="0">
                 <a:solidFill>
                   <a:srgbClr val="FFFFFF"/>
                 </a:solidFill>
@@ -12882,7 +12882,7 @@
               </a:rPr>
               <a:t>init / update / draw</a:t>
             </a:r>
-            <a:endParaRPr lang="en-US" sz="1222" dirty="0"/>
+            <a:endParaRPr lang="en-US" sz="1598" dirty="0"/>
           </a:p>
         </p:txBody>
       </p:sp>
@@ -12911,7 +12911,7 @@
               <a:buNone/>
             </a:pPr>
             <a:r>
-              <a:rPr lang="en-US" sz="1022" dirty="0">
+              <a:rPr lang="en-US" sz="1398" dirty="0">
                 <a:solidFill>
                   <a:srgbClr val="5B6B78"/>
                 </a:solidFill>
@@ -12921,7 +12921,7 @@
               </a:rPr>
               <a:t>12 byte</a:t>
             </a:r>
-            <a:endParaRPr lang="en-US" sz="1022" dirty="0"/>
+            <a:endParaRPr lang="en-US" sz="1398" dirty="0"/>
           </a:p>
         </p:txBody>
       </p:sp>
@@ -12950,7 +12950,7 @@
               <a:buNone/>
             </a:pPr>
             <a:r>
-              <a:rPr lang="en-US" sz="1222" dirty="0">
+              <a:rPr lang="en-US" sz="1598" dirty="0">
                 <a:solidFill>
                   <a:srgbClr val="1B2530"/>
                 </a:solidFill>
@@ -12960,7 +12960,7 @@
               </a:rPr>
               <a:t>dove iniziano le tre funzioni del gioco</a:t>
             </a:r>
-            <a:endParaRPr lang="en-US" sz="1222" dirty="0"/>
+            <a:endParaRPr lang="en-US" sz="1598" dirty="0"/>
           </a:p>
         </p:txBody>
       </p:sp>
@@ -12989,7 +12989,7 @@
               <a:buNone/>
             </a:pPr>
             <a:r>
-              <a:rPr lang="en-US" sz="1022" dirty="0">
+              <a:rPr lang="en-US" sz="1398" dirty="0">
                 <a:solidFill>
                   <a:srgbClr val="5B6B78"/>
                 </a:solidFill>
@@ -12999,7 +12999,7 @@
               </a:rPr>
               <a:t>+36</a:t>
             </a:r>
-            <a:endParaRPr lang="en-US" sz="1022" dirty="0"/>
+            <a:endParaRPr lang="en-US" sz="1398" dirty="0"/>
           </a:p>
         </p:txBody>
       </p:sp>
@@ -13034,7 +13034,7 @@
               <a:buNone/>
             </a:pPr>
             <a:r>
-              <a:rPr lang="en-US" sz="1222" b="1" dirty="0">
+              <a:rPr lang="en-US" sz="1598" b="1" dirty="0">
                 <a:solidFill>
                   <a:srgbClr val="FFFFFF"/>
                 </a:solidFill>
@@ -13044,7 +13044,7 @@
               </a:rPr>
               <a:t>CRC32</a:t>
             </a:r>
-            <a:endParaRPr lang="en-US" sz="1222" dirty="0"/>
+            <a:endParaRPr lang="en-US" sz="1598" dirty="0"/>
           </a:p>
         </p:txBody>
       </p:sp>
@@ -13073,7 +13073,7 @@
               <a:buNone/>
             </a:pPr>
             <a:r>
-              <a:rPr lang="en-US" sz="1022" dirty="0">
+              <a:rPr lang="en-US" sz="1398" dirty="0">
                 <a:solidFill>
                   <a:srgbClr val="5B6B78"/>
                 </a:solidFill>
@@ -13083,7 +13083,7 @@
               </a:rPr>
               <a:t>4 byte</a:t>
             </a:r>
-            <a:endParaRPr lang="en-US" sz="1022" dirty="0"/>
+            <a:endParaRPr lang="en-US" sz="1398" dirty="0"/>
           </a:p>
         </p:txBody>
       </p:sp>
@@ -13112,7 +13112,7 @@
               <a:buNone/>
             </a:pPr>
             <a:r>
-              <a:rPr lang="en-US" sz="1222" dirty="0">
+              <a:rPr lang="en-US" sz="1598" dirty="0">
                 <a:solidFill>
                   <a:srgbClr val="1B2530"/>
                 </a:solidFill>
@@ -13122,7 +13122,7 @@
               </a:rPr>
               <a:t>controllo: il file è arrivato intatto?</a:t>
             </a:r>
-            <a:endParaRPr lang="en-US" sz="1222" dirty="0"/>
+            <a:endParaRPr lang="en-US" sz="1598" dirty="0"/>
           </a:p>
         </p:txBody>
       </p:sp>
@@ -13151,7 +13151,7 @@
               <a:buNone/>
             </a:pPr>
             <a:r>
-              <a:rPr lang="en-US" sz="1022" dirty="0">
+              <a:rPr lang="en-US" sz="1398" dirty="0">
                 <a:solidFill>
                   <a:srgbClr val="5B6B78"/>
                 </a:solidFill>
@@ -13161,7 +13161,7 @@
               </a:rPr>
               <a:t>+40</a:t>
             </a:r>
-            <a:endParaRPr lang="en-US" sz="1022" dirty="0"/>
+            <a:endParaRPr lang="en-US" sz="1398" dirty="0"/>
           </a:p>
         </p:txBody>
       </p:sp>
@@ -13196,7 +13196,7 @@
               <a:buNone/>
             </a:pPr>
             <a:r>
-              <a:rPr lang="en-US" sz="1222" b="1" dirty="0">
+              <a:rPr lang="en-US" sz="1598" b="1" dirty="0">
                 <a:solidFill>
                   <a:srgbClr val="FFFFFF"/>
                 </a:solidFill>
@@ -13206,7 +13206,7 @@
               </a:rPr>
               <a:t>nome</a:t>
             </a:r>
-            <a:endParaRPr lang="en-US" sz="1222" dirty="0"/>
+            <a:endParaRPr lang="en-US" sz="1598" dirty="0"/>
           </a:p>
         </p:txBody>
       </p:sp>
@@ -13235,7 +13235,7 @@
               <a:buNone/>
             </a:pPr>
             <a:r>
-              <a:rPr lang="en-US" sz="1022" dirty="0">
+              <a:rPr lang="en-US" sz="1398" dirty="0">
                 <a:solidFill>
                   <a:srgbClr val="5B6B78"/>
                 </a:solidFill>
@@ -13245,7 +13245,7 @@
               </a:rPr>
               <a:t>32 byte</a:t>
             </a:r>
-            <a:endParaRPr lang="en-US" sz="1022" dirty="0"/>
+            <a:endParaRPr lang="en-US" sz="1398" dirty="0"/>
           </a:p>
         </p:txBody>
       </p:sp>
@@ -13274,7 +13274,7 @@
               <a:buNone/>
             </a:pPr>
             <a:r>
-              <a:rPr lang="en-US" sz="1222" dirty="0">
+              <a:rPr lang="en-US" sz="1598" dirty="0">
                 <a:solidFill>
                   <a:srgbClr val="1B2530"/>
                 </a:solidFill>
@@ -13284,7 +13284,7 @@
               </a:rPr>
               <a:t>quello che si legge nel menu</a:t>
             </a:r>
-            <a:endParaRPr lang="en-US" sz="1222" dirty="0"/>
+            <a:endParaRPr lang="en-US" sz="1598" dirty="0"/>
           </a:p>
         </p:txBody>
       </p:sp>
@@ -13313,7 +13313,7 @@
               <a:buNone/>
             </a:pPr>
             <a:r>
-              <a:rPr lang="en-US" sz="1022" dirty="0">
+              <a:rPr lang="en-US" sz="1398" dirty="0">
                 <a:solidFill>
                   <a:srgbClr val="5B6B78"/>
                 </a:solidFill>
@@ -13323,7 +13323,7 @@
               </a:rPr>
               <a:t>+72</a:t>
             </a:r>
-            <a:endParaRPr lang="en-US" sz="1022" dirty="0"/>
+            <a:endParaRPr lang="en-US" sz="1398" dirty="0"/>
           </a:p>
         </p:txBody>
       </p:sp>
@@ -13358,7 +13358,7 @@
               <a:buNone/>
             </a:pPr>
             <a:r>
-              <a:rPr lang="en-US" sz="1222" b="1" dirty="0">
+              <a:rPr lang="en-US" sz="1398" b="1" dirty="0">
                 <a:solidFill>
                   <a:srgbClr val="FFFFFF"/>
                 </a:solidFill>
@@ -13368,7 +13368,7 @@
               </a:rPr>
               <a:t>hash ABI, funzioni richieste</a:t>
             </a:r>
-            <a:endParaRPr lang="en-US" sz="1222" dirty="0"/>
+            <a:endParaRPr lang="en-US" sz="1398" dirty="0"/>
           </a:p>
         </p:txBody>
       </p:sp>
@@ -13397,7 +13397,7 @@
               <a:buNone/>
             </a:pPr>
             <a:r>
-              <a:rPr lang="en-US" sz="1022" dirty="0">
+              <a:rPr lang="en-US" sz="1398" dirty="0">
                 <a:solidFill>
                   <a:srgbClr val="5B6B78"/>
                 </a:solidFill>
@@ -13407,7 +13407,7 @@
               </a:rPr>
               <a:t>28 byte</a:t>
             </a:r>
-            <a:endParaRPr lang="en-US" sz="1022" dirty="0"/>
+            <a:endParaRPr lang="en-US" sz="1398" dirty="0"/>
           </a:p>
         </p:txBody>
       </p:sp>
@@ -13436,7 +13436,7 @@
               <a:buNone/>
             </a:pPr>
             <a:r>
-              <a:rPr lang="en-US" sz="1222" dirty="0">
+              <a:rPr lang="en-US" sz="1598" dirty="0">
                 <a:solidFill>
                   <a:srgbClr val="1B2530"/>
                 </a:solidFill>
@@ -13446,7 +13446,7 @@
               </a:rPr>
               <a:t>la console rifiuta ciò che non può eseguire</a:t>
             </a:r>
-            <a:endParaRPr lang="en-US" sz="1222" dirty="0"/>
+            <a:endParaRPr lang="en-US" sz="1598" dirty="0"/>
           </a:p>
         </p:txBody>
       </p:sp>
@@ -13474,7 +13474,7 @@
             <a:pPr algn="r" indent="0" marL="0">
               <a:buNone/>
             </a:pPr>
-            <a:endParaRPr lang="en-US" sz="1022" dirty="0"/>
+            <a:endParaRPr lang="en-US" sz="1398" dirty="0"/>
           </a:p>
         </p:txBody>
       </p:sp>
@@ -13509,7 +13509,7 @@
               <a:buNone/>
             </a:pPr>
             <a:r>
-              <a:rPr lang="en-US" sz="1222" b="1" dirty="0">
+              <a:rPr lang="en-US" sz="1598" b="1" dirty="0">
                 <a:solidFill>
                   <a:srgbClr val="FFFFFF"/>
                 </a:solidFill>
@@ -13519,7 +13519,7 @@
               </a:rPr>
               <a:t>codice e dati del gioco</a:t>
             </a:r>
-            <a:endParaRPr lang="en-US" sz="1222" dirty="0"/>
+            <a:endParaRPr lang="en-US" sz="1598" dirty="0"/>
           </a:p>
         </p:txBody>
       </p:sp>
@@ -13548,7 +13548,7 @@
               <a:buNone/>
             </a:pPr>
             <a:r>
-              <a:rPr lang="en-US" sz="1022" dirty="0">
+              <a:rPr lang="en-US" sz="1398" dirty="0">
                 <a:solidFill>
                   <a:srgbClr val="5B6B78"/>
                 </a:solidFill>
@@ -13558,7 +13558,7 @@
               </a:rPr>
               <a:t>~3,4 KiB</a:t>
             </a:r>
-            <a:endParaRPr lang="en-US" sz="1022" dirty="0"/>
+            <a:endParaRPr lang="en-US" sz="1398" dirty="0"/>
           </a:p>
         </p:txBody>
       </p:sp>
@@ -13587,7 +13587,7 @@
               <a:buNone/>
             </a:pPr>
             <a:r>
-              <a:rPr lang="en-US" sz="1222" dirty="0">
+              <a:rPr lang="en-US" sz="1598" dirty="0">
                 <a:solidFill>
                   <a:srgbClr val="1B2530"/>
                 </a:solidFill>
@@ -13597,7 +13597,7 @@
               </a:rPr>
               <a:t>le istruzioni RISC-V che scriviamo oggi</a:t>
             </a:r>
-            <a:endParaRPr lang="en-US" sz="1222" dirty="0"/>
+            <a:endParaRPr lang="en-US" sz="1598" dirty="0"/>
           </a:p>
         </p:txBody>
       </p:sp>
@@ -24226,7 +24226,7 @@
               <a:buNone/>
             </a:pPr>
             <a:r>
-              <a:rPr lang="en-US" sz="1200" dirty="0">
+              <a:rPr lang="en-US" sz="1350" dirty="0">
                 <a:solidFill>
                   <a:srgbClr val="E6EDF2"/>
                 </a:solidFill>
@@ -24236,14 +24236,14 @@
               </a:rPr>
               <a:t>breakout_draw:</a:t>
             </a:r>
-            <a:endParaRPr lang="en-US" sz="1200" dirty="0"/>
+            <a:endParaRPr lang="en-US" sz="1350" dirty="0"/>
           </a:p>
           <a:p>
             <a:pPr indent="0" marL="0">
               <a:buNone/>
             </a:pPr>
             <a:r>
-              <a:rPr lang="en-US" sz="1200" dirty="0">
+              <a:rPr lang="en-US" sz="1350" dirty="0">
                 <a:solidFill>
                   <a:srgbClr val="E6EDF2"/>
                 </a:solidFill>
@@ -24253,14 +24253,14 @@
               </a:rPr>
               <a:t>    addi sp, sp, -16</a:t>
             </a:r>
-            <a:endParaRPr lang="en-US" sz="1200" dirty="0"/>
+            <a:endParaRPr lang="en-US" sz="1350" dirty="0"/>
           </a:p>
           <a:p>
             <a:pPr indent="0" marL="0">
               <a:buNone/>
             </a:pPr>
             <a:r>
-              <a:rPr lang="en-US" sz="1200" dirty="0">
+              <a:rPr lang="en-US" sz="1350" dirty="0">
                 <a:solidFill>
                   <a:srgbClr val="E6EDF2"/>
                 </a:solidFill>
@@ -24270,14 +24270,14 @@
               </a:rPr>
               <a:t>    sw   ra, 12(sp)</a:t>
             </a:r>
-            <a:endParaRPr lang="en-US" sz="1200" dirty="0"/>
+            <a:endParaRPr lang="en-US" sz="1350" dirty="0"/>
           </a:p>
           <a:p>
             <a:pPr indent="0" marL="0">
               <a:buNone/>
             </a:pPr>
             <a:r>
-              <a:rPr lang="en-US" sz="1200" dirty="0">
+              <a:rPr lang="en-US" sz="1350" dirty="0">
                 <a:solidFill>
                   <a:srgbClr val="E6EDF2"/>
                 </a:solidFill>
@@ -24287,14 +24287,14 @@
               </a:rPr>
               <a:t> </a:t>
             </a:r>
-            <a:endParaRPr lang="en-US" sz="1200" dirty="0"/>
+            <a:endParaRPr lang="en-US" sz="1350" dirty="0"/>
           </a:p>
           <a:p>
             <a:pPr indent="0" marL="0">
               <a:buNone/>
             </a:pPr>
             <a:r>
-              <a:rPr lang="en-US" sz="1200" dirty="0">
+              <a:rPr lang="en-US" sz="1350" dirty="0">
                 <a:solidFill>
                   <a:srgbClr val="E6EDF2"/>
                 </a:solidFill>
@@ -24304,14 +24304,14 @@
               </a:rPr>
               <a:t>    li   a0, BLACK</a:t>
             </a:r>
-            <a:endParaRPr lang="en-US" sz="1200" dirty="0"/>
+            <a:endParaRPr lang="en-US" sz="1350" dirty="0"/>
           </a:p>
           <a:p>
             <a:pPr indent="0" marL="0">
               <a:buNone/>
             </a:pPr>
             <a:r>
-              <a:rPr lang="en-US" sz="1200" dirty="0">
+              <a:rPr lang="en-US" sz="1350" dirty="0">
                 <a:solidFill>
                   <a:srgbClr val="E6EDF2"/>
                 </a:solidFill>
@@ -24325,7 +24325,7 @@
               <a:buNone/>
             </a:pPr>
             <a:r>
-              <a:rPr lang="en-US" sz="1200" dirty="0">
+              <a:rPr lang="en-US" sz="1350" dirty="0">
                 <a:solidFill>
                   <a:srgbClr val="8FB3A0"/>
                 </a:solidFill>
@@ -24333,16 +24333,16 @@
                 <a:ea typeface="Courier New" pitchFamily="34" charset="-122"/>
                 <a:cs typeface="Courier New" pitchFamily="34" charset="-120"/>
               </a:rPr>
-              <a:t># prima si cancella, poi si disegna</a:t>
-            </a:r>
-            <a:endParaRPr lang="en-US" sz="1200" dirty="0"/>
+              <a:t># prima si cancella, poi si</a:t>
+            </a:r>
+            <a:endParaRPr lang="en-US" sz="1350" dirty="0"/>
           </a:p>
           <a:p>
             <a:pPr indent="0" marL="0">
               <a:buNone/>
             </a:pPr>
             <a:r>
-              <a:rPr lang="en-US" sz="1200" dirty="0">
+              <a:rPr lang="en-US" sz="1350" dirty="0">
                 <a:solidFill>
                   <a:srgbClr val="E6EDF2"/>
                 </a:solidFill>
@@ -24350,16 +24350,16 @@
                 <a:ea typeface="Courier New" pitchFamily="34" charset="-122"/>
                 <a:cs typeface="Courier New" pitchFamily="34" charset="-120"/>
               </a:rPr>
-              <a:t>    lw   ra, 12(sp)</a:t>
-            </a:r>
-            <a:endParaRPr lang="en-US" sz="1200" dirty="0"/>
+              <a:t>        disegna</a:t>
+            </a:r>
+            <a:endParaRPr lang="en-US" sz="1350" dirty="0"/>
           </a:p>
           <a:p>
             <a:pPr indent="0" marL="0">
               <a:buNone/>
             </a:pPr>
             <a:r>
-              <a:rPr lang="en-US" sz="1200" dirty="0">
+              <a:rPr lang="en-US" sz="1350" dirty="0">
                 <a:solidFill>
                   <a:srgbClr val="E6EDF2"/>
                 </a:solidFill>
@@ -24367,16 +24367,16 @@
                 <a:ea typeface="Courier New" pitchFamily="34" charset="-122"/>
                 <a:cs typeface="Courier New" pitchFamily="34" charset="-120"/>
               </a:rPr>
-              <a:t>    addi sp, sp, 16</a:t>
-            </a:r>
-            <a:endParaRPr lang="en-US" sz="1200" dirty="0"/>
+              <a:t>    lw   ra, 12(sp)</a:t>
+            </a:r>
+            <a:endParaRPr lang="en-US" sz="1350" dirty="0"/>
           </a:p>
           <a:p>
             <a:pPr indent="0" marL="0">
               <a:buNone/>
             </a:pPr>
             <a:r>
-              <a:rPr lang="en-US" sz="1200" dirty="0">
+              <a:rPr lang="en-US" sz="1350" dirty="0">
                 <a:solidFill>
                   <a:srgbClr val="E6EDF2"/>
                 </a:solidFill>
@@ -24384,9 +24384,26 @@
                 <a:ea typeface="Courier New" pitchFamily="34" charset="-122"/>
                 <a:cs typeface="Courier New" pitchFamily="34" charset="-120"/>
               </a:rPr>
+              <a:t>    addi sp, sp, 16</a:t>
+            </a:r>
+            <a:endParaRPr lang="en-US" sz="1350" dirty="0"/>
+          </a:p>
+          <a:p>
+            <a:pPr indent="0" marL="0">
+              <a:buNone/>
+            </a:pPr>
+            <a:r>
+              <a:rPr lang="en-US" sz="1350" dirty="0">
+                <a:solidFill>
+                  <a:srgbClr val="E6EDF2"/>
+                </a:solidFill>
+                <a:latin typeface="Courier New" pitchFamily="34" charset="0"/>
+                <a:ea typeface="Courier New" pitchFamily="34" charset="-122"/>
+                <a:cs typeface="Courier New" pitchFamily="34" charset="-120"/>
+              </a:rPr>
               <a:t>    ret</a:t>
             </a:r>
-            <a:endParaRPr lang="en-US" sz="1200" dirty="0"/>
+            <a:endParaRPr lang="en-US" sz="1350" dirty="0"/>
           </a:p>
         </p:txBody>
       </p:sp>
@@ -27057,7 +27074,7 @@
               <a:buNone/>
             </a:pPr>
             <a:r>
-              <a:rPr lang="en-US" sz="1200" dirty="0">
+              <a:rPr lang="en-US" sz="1250" dirty="0">
                 <a:solidFill>
                   <a:srgbClr val="E6EDF2"/>
                 </a:solidFill>
@@ -27071,7 +27088,7 @@
               <a:buNone/>
             </a:pPr>
             <a:r>
-              <a:rPr lang="en-US" sz="1200" dirty="0">
+              <a:rPr lang="en-US" sz="1250" dirty="0">
                 <a:solidFill>
                   <a:srgbClr val="8FB3A0"/>
                 </a:solidFill>
@@ -27081,14 +27098,14 @@
               </a:rPr>
               <a:t># --- racchetta: leggi i pulsanti, muovi, resta nello schermo</a:t>
             </a:r>
-            <a:endParaRPr lang="en-US" sz="1200" dirty="0"/>
+            <a:endParaRPr lang="en-US" sz="1250" dirty="0"/>
           </a:p>
           <a:p>
             <a:pPr indent="0" marL="0">
               <a:buNone/>
             </a:pPr>
             <a:r>
-              <a:rPr lang="en-US" sz="1200" dirty="0">
+              <a:rPr lang="en-US" sz="1250" dirty="0">
                 <a:solidFill>
                   <a:srgbClr val="E6EDF2"/>
                 </a:solidFill>
@@ -27102,7 +27119,7 @@
               <a:buNone/>
             </a:pPr>
             <a:r>
-              <a:rPr lang="en-US" sz="1200" dirty="0">
+              <a:rPr lang="en-US" sz="1250" dirty="0">
                 <a:solidFill>
                   <a:srgbClr val="8FB3A0"/>
                 </a:solidFill>
@@ -27110,16 +27127,16 @@
                 <a:ea typeface="Courier New" pitchFamily="34" charset="-122"/>
                 <a:cs typeface="Courier New" pitchFamily="34" charset="-120"/>
               </a:rPr>
-              <a:t># a0 = maschera dei pulsanti premuti</a:t>
-            </a:r>
-            <a:endParaRPr lang="en-US" sz="1200" dirty="0"/>
+              <a:t># a0 = maschera dei pulsanti</a:t>
+            </a:r>
+            <a:endParaRPr lang="en-US" sz="1250" dirty="0"/>
           </a:p>
           <a:p>
             <a:pPr indent="0" marL="0">
               <a:buNone/>
             </a:pPr>
             <a:r>
-              <a:rPr lang="en-US" sz="1200" dirty="0">
+              <a:rPr lang="en-US" sz="1250" dirty="0">
                 <a:solidFill>
                   <a:srgbClr val="E6EDF2"/>
                 </a:solidFill>
@@ -27127,16 +27144,16 @@
                 <a:ea typeface="Courier New" pitchFamily="34" charset="-122"/>
                 <a:cs typeface="Courier New" pitchFamily="34" charset="-120"/>
               </a:rPr>
-              <a:t>    la   t1, paddle_x</a:t>
-            </a:r>
-            <a:endParaRPr lang="en-US" sz="1200" dirty="0"/>
+              <a:t>        premuti</a:t>
+            </a:r>
+            <a:endParaRPr lang="en-US" sz="1250" dirty="0"/>
           </a:p>
           <a:p>
             <a:pPr indent="0" marL="0">
               <a:buNone/>
             </a:pPr>
             <a:r>
-              <a:rPr lang="en-US" sz="1200" dirty="0">
+              <a:rPr lang="en-US" sz="1250" dirty="0">
                 <a:solidFill>
                   <a:srgbClr val="E6EDF2"/>
                 </a:solidFill>
@@ -27144,78 +27161,78 @@
                 <a:ea typeface="Courier New" pitchFamily="34" charset="-122"/>
                 <a:cs typeface="Courier New" pitchFamily="34" charset="-120"/>
               </a:rPr>
-              <a:t>    lw   t2, 0(t1)              </a:t>
-            </a:r>
+              <a:t>    la   t1, paddle_x</a:t>
+            </a:r>
+            <a:endParaRPr lang="en-US" sz="1250" dirty="0"/>
+          </a:p>
+          <a:p>
             <a:pPr indent="0" marL="0">
               <a:buNone/>
             </a:pPr>
             <a:r>
-              <a:rPr lang="en-US" sz="1200" dirty="0">
-                <a:solidFill>
-                  <a:srgbClr val="8FB3A0"/>
+              <a:rPr lang="en-US" sz="1250" dirty="0">
+                <a:solidFill>
+                  <a:srgbClr val="E6EDF2"/>
                 </a:solidFill>
                 <a:latin typeface="Courier New" pitchFamily="34" charset="0"/>
                 <a:ea typeface="Courier New" pitchFamily="34" charset="-122"/>
                 <a:cs typeface="Courier New" pitchFamily="34" charset="-120"/>
               </a:rPr>
-              <a:t># t2 = paddle_x (carica)</a:t>
-            </a:r>
-            <a:endParaRPr lang="en-US" sz="1200" dirty="0"/>
-          </a:p>
-          <a:p>
+              <a:t>    lw   t2, 0(t1)              </a:t>
+            </a:r>
             <a:pPr indent="0" marL="0">
               <a:buNone/>
             </a:pPr>
             <a:r>
-              <a:rPr lang="en-US" sz="1200" dirty="0">
-                <a:solidFill>
-                  <a:srgbClr val="E6EDF2"/>
+              <a:rPr lang="en-US" sz="1250" dirty="0">
+                <a:solidFill>
+                  <a:srgbClr val="8FB3A0"/>
                 </a:solidFill>
                 <a:latin typeface="Courier New" pitchFamily="34" charset="0"/>
                 <a:ea typeface="Courier New" pitchFamily="34" charset="-122"/>
                 <a:cs typeface="Courier New" pitchFamily="34" charset="-120"/>
               </a:rPr>
-              <a:t>    andi t3, a0, BTN_LEFT       </a:t>
-            </a:r>
+              <a:t># t2 = paddle_x (carica)</a:t>
+            </a:r>
+            <a:endParaRPr lang="en-US" sz="1250" dirty="0"/>
+          </a:p>
+          <a:p>
             <a:pPr indent="0" marL="0">
               <a:buNone/>
             </a:pPr>
             <a:r>
-              <a:rPr lang="en-US" sz="1200" dirty="0">
-                <a:solidFill>
-                  <a:srgbClr val="8FB3A0"/>
+              <a:rPr lang="en-US" sz="1250" dirty="0">
+                <a:solidFill>
+                  <a:srgbClr val="E6EDF2"/>
                 </a:solidFill>
                 <a:latin typeface="Courier New" pitchFamily="34" charset="0"/>
                 <a:ea typeface="Courier New" pitchFamily="34" charset="-122"/>
                 <a:cs typeface="Courier New" pitchFamily="34" charset="-120"/>
               </a:rPr>
-              <a:t># isola il bit SINISTRA</a:t>
-            </a:r>
-            <a:endParaRPr lang="en-US" sz="1200" dirty="0"/>
-          </a:p>
-          <a:p>
+              <a:t>    andi t3, a0, BTN_LEFT       </a:t>
+            </a:r>
             <a:pPr indent="0" marL="0">
               <a:buNone/>
             </a:pPr>
             <a:r>
-              <a:rPr lang="en-US" sz="1200" dirty="0">
-                <a:solidFill>
-                  <a:srgbClr val="E6EDF2"/>
+              <a:rPr lang="en-US" sz="1250" dirty="0">
+                <a:solidFill>
+                  <a:srgbClr val="8FB3A0"/>
                 </a:solidFill>
                 <a:latin typeface="Courier New" pitchFamily="34" charset="0"/>
                 <a:ea typeface="Courier New" pitchFamily="34" charset="-122"/>
                 <a:cs typeface="Courier New" pitchFamily="34" charset="-120"/>
               </a:rPr>
-              <a:t>    beqz t3, 1f</a:t>
-            </a:r>
-            <a:endParaRPr lang="en-US" sz="1200" dirty="0"/>
+              <a:t># isola il bit SINISTRA</a:t>
+            </a:r>
+            <a:endParaRPr lang="en-US" sz="1250" dirty="0"/>
           </a:p>
           <a:p>
             <a:pPr indent="0" marL="0">
               <a:buNone/>
             </a:pPr>
             <a:r>
-              <a:rPr lang="en-US" sz="1200" dirty="0">
+              <a:rPr lang="en-US" sz="1250" dirty="0">
                 <a:solidFill>
                   <a:srgbClr val="E6EDF2"/>
                 </a:solidFill>
@@ -27223,16 +27240,16 @@
                 <a:ea typeface="Courier New" pitchFamily="34" charset="-122"/>
                 <a:cs typeface="Courier New" pitchFamily="34" charset="-120"/>
               </a:rPr>
-              <a:t>    addi t2, t2, -PADDLE_SPEED</a:t>
-            </a:r>
-            <a:endParaRPr lang="en-US" sz="1200" dirty="0"/>
+              <a:t>    beqz t3, 1f</a:t>
+            </a:r>
+            <a:endParaRPr lang="en-US" sz="1250" dirty="0"/>
           </a:p>
           <a:p>
             <a:pPr indent="0" marL="0">
               <a:buNone/>
             </a:pPr>
             <a:r>
-              <a:rPr lang="en-US" sz="1200" dirty="0">
+              <a:rPr lang="en-US" sz="1250" dirty="0">
                 <a:solidFill>
                   <a:srgbClr val="E6EDF2"/>
                 </a:solidFill>
@@ -27240,47 +27257,47 @@
                 <a:ea typeface="Courier New" pitchFamily="34" charset="-122"/>
                 <a:cs typeface="Courier New" pitchFamily="34" charset="-120"/>
               </a:rPr>
-              <a:t>1:  andi t3, a0, BTN_RIGHT      </a:t>
-            </a:r>
+              <a:t>    addi t2, t2, -PADDLE_SPEED</a:t>
+            </a:r>
+            <a:endParaRPr lang="en-US" sz="1250" dirty="0"/>
+          </a:p>
+          <a:p>
             <a:pPr indent="0" marL="0">
               <a:buNone/>
             </a:pPr>
             <a:r>
-              <a:rPr lang="en-US" sz="1200" dirty="0">
-                <a:solidFill>
-                  <a:srgbClr val="8FB3A0"/>
+              <a:rPr lang="en-US" sz="1250" dirty="0">
+                <a:solidFill>
+                  <a:srgbClr val="E6EDF2"/>
                 </a:solidFill>
                 <a:latin typeface="Courier New" pitchFamily="34" charset="0"/>
                 <a:ea typeface="Courier New" pitchFamily="34" charset="-122"/>
                 <a:cs typeface="Courier New" pitchFamily="34" charset="-120"/>
               </a:rPr>
-              <a:t># isola il bit DESTRA</a:t>
-            </a:r>
-            <a:endParaRPr lang="en-US" sz="1200" dirty="0"/>
-          </a:p>
-          <a:p>
+              <a:t>1:  andi t3, a0, BTN_RIGHT      </a:t>
+            </a:r>
             <a:pPr indent="0" marL="0">
               <a:buNone/>
             </a:pPr>
             <a:r>
-              <a:rPr lang="en-US" sz="1200" dirty="0">
-                <a:solidFill>
-                  <a:srgbClr val="E6EDF2"/>
+              <a:rPr lang="en-US" sz="1250" dirty="0">
+                <a:solidFill>
+                  <a:srgbClr val="8FB3A0"/>
                 </a:solidFill>
                 <a:latin typeface="Courier New" pitchFamily="34" charset="0"/>
                 <a:ea typeface="Courier New" pitchFamily="34" charset="-122"/>
                 <a:cs typeface="Courier New" pitchFamily="34" charset="-120"/>
               </a:rPr>
-              <a:t>    beqz t3, 2f</a:t>
-            </a:r>
-            <a:endParaRPr lang="en-US" sz="1200" dirty="0"/>
+              <a:t># isola il bit DESTRA</a:t>
+            </a:r>
+            <a:endParaRPr lang="en-US" sz="1250" dirty="0"/>
           </a:p>
           <a:p>
             <a:pPr indent="0" marL="0">
               <a:buNone/>
             </a:pPr>
             <a:r>
-              <a:rPr lang="en-US" sz="1200" dirty="0">
+              <a:rPr lang="en-US" sz="1250" dirty="0">
                 <a:solidFill>
                   <a:srgbClr val="E6EDF2"/>
                 </a:solidFill>
@@ -27288,16 +27305,16 @@
                 <a:ea typeface="Courier New" pitchFamily="34" charset="-122"/>
                 <a:cs typeface="Courier New" pitchFamily="34" charset="-120"/>
               </a:rPr>
-              <a:t>    addi t2, t2, PADDLE_SPEED</a:t>
-            </a:r>
-            <a:endParaRPr lang="en-US" sz="1200" dirty="0"/>
+              <a:t>    beqz t3, 2f</a:t>
+            </a:r>
+            <a:endParaRPr lang="en-US" sz="1250" dirty="0"/>
           </a:p>
           <a:p>
             <a:pPr indent="0" marL="0">
               <a:buNone/>
             </a:pPr>
             <a:r>
-              <a:rPr lang="en-US" sz="1200" dirty="0">
+              <a:rPr lang="en-US" sz="1250" dirty="0">
                 <a:solidFill>
                   <a:srgbClr val="E6EDF2"/>
                 </a:solidFill>
@@ -27305,47 +27322,47 @@
                 <a:ea typeface="Courier New" pitchFamily="34" charset="-122"/>
                 <a:cs typeface="Courier New" pitchFamily="34" charset="-120"/>
               </a:rPr>
-              <a:t>2:  bgez t2, 3f                 </a:t>
-            </a:r>
+              <a:t>    addi t2, t2, PADDLE_SPEED</a:t>
+            </a:r>
+            <a:endParaRPr lang="en-US" sz="1250" dirty="0"/>
+          </a:p>
+          <a:p>
             <a:pPr indent="0" marL="0">
               <a:buNone/>
             </a:pPr>
             <a:r>
-              <a:rPr lang="en-US" sz="1200" dirty="0">
-                <a:solidFill>
-                  <a:srgbClr val="8FB3A0"/>
+              <a:rPr lang="en-US" sz="1250" dirty="0">
+                <a:solidFill>
+                  <a:srgbClr val="E6EDF2"/>
                 </a:solidFill>
                 <a:latin typeface="Courier New" pitchFamily="34" charset="0"/>
                 <a:ea typeface="Courier New" pitchFamily="34" charset="-122"/>
                 <a:cs typeface="Courier New" pitchFamily="34" charset="-120"/>
               </a:rPr>
-              <a:t># x &lt; 0 ?  allora x = 0</a:t>
-            </a:r>
-            <a:endParaRPr lang="en-US" sz="1200" dirty="0"/>
-          </a:p>
-          <a:p>
+              <a:t>2:  bgez t2, 3f                 </a:t>
+            </a:r>
             <a:pPr indent="0" marL="0">
               <a:buNone/>
             </a:pPr>
             <a:r>
-              <a:rPr lang="en-US" sz="1200" dirty="0">
-                <a:solidFill>
-                  <a:srgbClr val="E6EDF2"/>
+              <a:rPr lang="en-US" sz="1250" dirty="0">
+                <a:solidFill>
+                  <a:srgbClr val="8FB3A0"/>
                 </a:solidFill>
                 <a:latin typeface="Courier New" pitchFamily="34" charset="0"/>
                 <a:ea typeface="Courier New" pitchFamily="34" charset="-122"/>
                 <a:cs typeface="Courier New" pitchFamily="34" charset="-120"/>
               </a:rPr>
-              <a:t>    li   t2, 0</a:t>
-            </a:r>
-            <a:endParaRPr lang="en-US" sz="1200" dirty="0"/>
+              <a:t># x &lt; 0 ?  allora x = 0</a:t>
+            </a:r>
+            <a:endParaRPr lang="en-US" sz="1250" dirty="0"/>
           </a:p>
           <a:p>
             <a:pPr indent="0" marL="0">
               <a:buNone/>
             </a:pPr>
             <a:r>
-              <a:rPr lang="en-US" sz="1200" dirty="0">
+              <a:rPr lang="en-US" sz="1250" dirty="0">
                 <a:solidFill>
                   <a:srgbClr val="E6EDF2"/>
                 </a:solidFill>
@@ -27353,16 +27370,16 @@
                 <a:ea typeface="Courier New" pitchFamily="34" charset="-122"/>
                 <a:cs typeface="Courier New" pitchFamily="34" charset="-120"/>
               </a:rPr>
-              <a:t>3:  li   t3, PADDLE_MAX</a:t>
-            </a:r>
-            <a:endParaRPr lang="en-US" sz="1200" dirty="0"/>
+              <a:t>    li   t2, 0</a:t>
+            </a:r>
+            <a:endParaRPr lang="en-US" sz="1250" dirty="0"/>
           </a:p>
           <a:p>
             <a:pPr indent="0" marL="0">
               <a:buNone/>
             </a:pPr>
             <a:r>
-              <a:rPr lang="en-US" sz="1200" dirty="0">
+              <a:rPr lang="en-US" sz="1250" dirty="0">
                 <a:solidFill>
                   <a:srgbClr val="E6EDF2"/>
                 </a:solidFill>
@@ -27370,40 +27387,57 @@
                 <a:ea typeface="Courier New" pitchFamily="34" charset="-122"/>
                 <a:cs typeface="Courier New" pitchFamily="34" charset="-120"/>
               </a:rPr>
-              <a:t>    ble  t2, t3, 4f             </a:t>
-            </a:r>
+              <a:t>3:  li   t3, PADDLE_MAX</a:t>
+            </a:r>
+            <a:endParaRPr lang="en-US" sz="1250" dirty="0"/>
+          </a:p>
+          <a:p>
             <a:pPr indent="0" marL="0">
               <a:buNone/>
             </a:pPr>
             <a:r>
-              <a:rPr lang="en-US" sz="1200" dirty="0">
-                <a:solidFill>
-                  <a:srgbClr val="8FB3A0"/>
+              <a:rPr lang="en-US" sz="1250" dirty="0">
+                <a:solidFill>
+                  <a:srgbClr val="E6EDF2"/>
                 </a:solidFill>
                 <a:latin typeface="Courier New" pitchFamily="34" charset="0"/>
                 <a:ea typeface="Courier New" pitchFamily="34" charset="-122"/>
                 <a:cs typeface="Courier New" pitchFamily="34" charset="-120"/>
               </a:rPr>
-              <a:t># x &gt; 272 ?  allora x = 272</a:t>
-            </a:r>
-            <a:endParaRPr lang="en-US" sz="1200" dirty="0"/>
-          </a:p>
-          <a:p>
+              <a:t>    ble  t2, t3, 4f             </a:t>
+            </a:r>
             <a:pPr indent="0" marL="0">
               <a:buNone/>
             </a:pPr>
             <a:r>
-              <a:rPr lang="en-US" sz="1200" dirty="0">
-                <a:solidFill>
-                  <a:srgbClr val="E6EDF2"/>
+              <a:rPr lang="en-US" sz="1250" dirty="0">
+                <a:solidFill>
+                  <a:srgbClr val="8FB3A0"/>
                 </a:solidFill>
                 <a:latin typeface="Courier New" pitchFamily="34" charset="0"/>
                 <a:ea typeface="Courier New" pitchFamily="34" charset="-122"/>
                 <a:cs typeface="Courier New" pitchFamily="34" charset="-120"/>
               </a:rPr>
+              <a:t># x &gt; 272 ?  allora x = 272</a:t>
+            </a:r>
+            <a:endParaRPr lang="en-US" sz="1250" dirty="0"/>
+          </a:p>
+          <a:p>
+            <a:pPr indent="0" marL="0">
+              <a:buNone/>
+            </a:pPr>
+            <a:r>
+              <a:rPr lang="en-US" sz="1250" dirty="0">
+                <a:solidFill>
+                  <a:srgbClr val="E6EDF2"/>
+                </a:solidFill>
+                <a:latin typeface="Courier New" pitchFamily="34" charset="0"/>
+                <a:ea typeface="Courier New" pitchFamily="34" charset="-122"/>
+                <a:cs typeface="Courier New" pitchFamily="34" charset="-120"/>
+              </a:rPr>
               <a:t>    mv   t2, t3</a:t>
             </a:r>
-            <a:endParaRPr lang="en-US" sz="1200" dirty="0"/>
+            <a:endParaRPr lang="en-US" sz="1250" dirty="0"/>
           </a:p>
         </p:txBody>
       </p:sp>
@@ -31297,7 +31331,7 @@
               <a:buNone/>
             </a:pPr>
             <a:r>
-              <a:rPr lang="en-US" sz="1100" dirty="0">
+              <a:rPr lang="en-US" sz="1250" dirty="0">
                 <a:solidFill>
                   <a:srgbClr val="E6EDF2"/>
                 </a:solidFill>
@@ -31311,7 +31345,7 @@
               <a:buNone/>
             </a:pPr>
             <a:r>
-              <a:rPr lang="en-US" sz="1100" dirty="0">
+              <a:rPr lang="en-US" sz="1250" dirty="0">
                 <a:solidFill>
                   <a:srgbClr val="8FB3A0"/>
                 </a:solidFill>
@@ -31321,14 +31355,14 @@
               </a:rPr>
               <a:t># --- la pallina tocca la racchetta?</a:t>
             </a:r>
-            <a:endParaRPr lang="en-US" sz="1100" dirty="0"/>
+            <a:endParaRPr lang="en-US" sz="1250" dirty="0"/>
           </a:p>
           <a:p>
             <a:pPr indent="0" marL="0">
               <a:buNone/>
             </a:pPr>
             <a:r>
-              <a:rPr lang="en-US" sz="1100" dirty="0">
+              <a:rPr lang="en-US" sz="1250" dirty="0">
                 <a:solidFill>
                   <a:srgbClr val="E6EDF2"/>
                 </a:solidFill>
@@ -31338,14 +31372,14 @@
               </a:rPr>
               <a:t>    la   t0, ball_x</a:t>
             </a:r>
-            <a:endParaRPr lang="en-US" sz="1100" dirty="0"/>
+            <a:endParaRPr lang="en-US" sz="1250" dirty="0"/>
           </a:p>
           <a:p>
             <a:pPr indent="0" marL="0">
               <a:buNone/>
             </a:pPr>
             <a:r>
-              <a:rPr lang="en-US" sz="1100" dirty="0">
+              <a:rPr lang="en-US" sz="1250" dirty="0">
                 <a:solidFill>
                   <a:srgbClr val="E6EDF2"/>
                 </a:solidFill>
@@ -31359,7 +31393,7 @@
               <a:buNone/>
             </a:pPr>
             <a:r>
-              <a:rPr lang="en-US" sz="1100" dirty="0">
+              <a:rPr lang="en-US" sz="1250" dirty="0">
                 <a:solidFill>
                   <a:srgbClr val="8FB3A0"/>
                 </a:solidFill>
@@ -31367,16 +31401,16 @@
                 <a:ea typeface="Courier New" pitchFamily="34" charset="-122"/>
                 <a:cs typeface="Courier New" pitchFamily="34" charset="-120"/>
               </a:rPr>
-              <a:t># a0..a3 = rettangolo della pallina</a:t>
-            </a:r>
-            <a:endParaRPr lang="en-US" sz="1100" dirty="0"/>
+              <a:t># a0..a3 = rettangolo della</a:t>
+            </a:r>
+            <a:endParaRPr lang="en-US" sz="1250" dirty="0"/>
           </a:p>
           <a:p>
             <a:pPr indent="0" marL="0">
               <a:buNone/>
             </a:pPr>
             <a:r>
-              <a:rPr lang="en-US" sz="1100" dirty="0">
+              <a:rPr lang="en-US" sz="1250" dirty="0">
                 <a:solidFill>
                   <a:srgbClr val="E6EDF2"/>
                 </a:solidFill>
@@ -31384,16 +31418,16 @@
                 <a:ea typeface="Courier New" pitchFamily="34" charset="-122"/>
                 <a:cs typeface="Courier New" pitchFamily="34" charset="-120"/>
               </a:rPr>
-              <a:t>    la   t0, ball_y</a:t>
-            </a:r>
-            <a:endParaRPr lang="en-US" sz="1100" dirty="0"/>
+              <a:t>        pallina</a:t>
+            </a:r>
+            <a:endParaRPr lang="en-US" sz="1250" dirty="0"/>
           </a:p>
           <a:p>
             <a:pPr indent="0" marL="0">
               <a:buNone/>
             </a:pPr>
             <a:r>
-              <a:rPr lang="en-US" sz="1100" dirty="0">
+              <a:rPr lang="en-US" sz="1250" dirty="0">
                 <a:solidFill>
                   <a:srgbClr val="E6EDF2"/>
                 </a:solidFill>
@@ -31401,16 +31435,16 @@
                 <a:ea typeface="Courier New" pitchFamily="34" charset="-122"/>
                 <a:cs typeface="Courier New" pitchFamily="34" charset="-120"/>
               </a:rPr>
-              <a:t>    lw   a1, 0(t0)</a:t>
-            </a:r>
-            <a:endParaRPr lang="en-US" sz="1100" dirty="0"/>
+              <a:t>    la   t0, ball_y</a:t>
+            </a:r>
+            <a:endParaRPr lang="en-US" sz="1250" dirty="0"/>
           </a:p>
           <a:p>
             <a:pPr indent="0" marL="0">
               <a:buNone/>
             </a:pPr>
             <a:r>
-              <a:rPr lang="en-US" sz="1100" dirty="0">
+              <a:rPr lang="en-US" sz="1250" dirty="0">
                 <a:solidFill>
                   <a:srgbClr val="E6EDF2"/>
                 </a:solidFill>
@@ -31418,16 +31452,16 @@
                 <a:ea typeface="Courier New" pitchFamily="34" charset="-122"/>
                 <a:cs typeface="Courier New" pitchFamily="34" charset="-120"/>
               </a:rPr>
-              <a:t>    li   a2, BALL_SIZE</a:t>
-            </a:r>
-            <a:endParaRPr lang="en-US" sz="1100" dirty="0"/>
+              <a:t>    lw   a1, 0(t0)</a:t>
+            </a:r>
+            <a:endParaRPr lang="en-US" sz="1250" dirty="0"/>
           </a:p>
           <a:p>
             <a:pPr indent="0" marL="0">
               <a:buNone/>
             </a:pPr>
             <a:r>
-              <a:rPr lang="en-US" sz="1100" dirty="0">
+              <a:rPr lang="en-US" sz="1250" dirty="0">
                 <a:solidFill>
                   <a:srgbClr val="E6EDF2"/>
                 </a:solidFill>
@@ -31435,16 +31469,16 @@
                 <a:ea typeface="Courier New" pitchFamily="34" charset="-122"/>
                 <a:cs typeface="Courier New" pitchFamily="34" charset="-120"/>
               </a:rPr>
-              <a:t>    li   a3, BALL_SIZE</a:t>
-            </a:r>
-            <a:endParaRPr lang="en-US" sz="1100" dirty="0"/>
+              <a:t>    li   a2, BALL_SIZE</a:t>
+            </a:r>
+            <a:endParaRPr lang="en-US" sz="1250" dirty="0"/>
           </a:p>
           <a:p>
             <a:pPr indent="0" marL="0">
               <a:buNone/>
             </a:pPr>
             <a:r>
-              <a:rPr lang="en-US" sz="1100" dirty="0">
+              <a:rPr lang="en-US" sz="1250" dirty="0">
                 <a:solidFill>
                   <a:srgbClr val="E6EDF2"/>
                 </a:solidFill>
@@ -31452,16 +31486,16 @@
                 <a:ea typeface="Courier New" pitchFamily="34" charset="-122"/>
                 <a:cs typeface="Courier New" pitchFamily="34" charset="-120"/>
               </a:rPr>
-              <a:t>    la   t0, paddle_x</a:t>
-            </a:r>
-            <a:endParaRPr lang="en-US" sz="1100" dirty="0"/>
+              <a:t>    li   a3, BALL_SIZE</a:t>
+            </a:r>
+            <a:endParaRPr lang="en-US" sz="1250" dirty="0"/>
           </a:p>
           <a:p>
             <a:pPr indent="0" marL="0">
               <a:buNone/>
             </a:pPr>
             <a:r>
-              <a:rPr lang="en-US" sz="1100" dirty="0">
+              <a:rPr lang="en-US" sz="1250" dirty="0">
                 <a:solidFill>
                   <a:srgbClr val="E6EDF2"/>
                 </a:solidFill>
@@ -31469,47 +31503,47 @@
                 <a:ea typeface="Courier New" pitchFamily="34" charset="-122"/>
                 <a:cs typeface="Courier New" pitchFamily="34" charset="-120"/>
               </a:rPr>
-              <a:t>    lw   a4, 0(t0)              </a:t>
-            </a:r>
+              <a:t>    la   t0, paddle_x</a:t>
+            </a:r>
+            <a:endParaRPr lang="en-US" sz="1250" dirty="0"/>
+          </a:p>
+          <a:p>
             <a:pPr indent="0" marL="0">
               <a:buNone/>
             </a:pPr>
             <a:r>
-              <a:rPr lang="en-US" sz="1100" dirty="0">
-                <a:solidFill>
-                  <a:srgbClr val="8FB3A0"/>
+              <a:rPr lang="en-US" sz="1250" dirty="0">
+                <a:solidFill>
+                  <a:srgbClr val="E6EDF2"/>
                 </a:solidFill>
                 <a:latin typeface="Courier New" pitchFamily="34" charset="0"/>
                 <a:ea typeface="Courier New" pitchFamily="34" charset="-122"/>
                 <a:cs typeface="Courier New" pitchFamily="34" charset="-120"/>
               </a:rPr>
-              <a:t># a4..a7 = rettangolo della racchetta</a:t>
-            </a:r>
-            <a:endParaRPr lang="en-US" sz="1100" dirty="0"/>
-          </a:p>
-          <a:p>
+              <a:t>    lw   a4, 0(t0)              </a:t>
+            </a:r>
             <a:pPr indent="0" marL="0">
               <a:buNone/>
             </a:pPr>
             <a:r>
-              <a:rPr lang="en-US" sz="1100" dirty="0">
-                <a:solidFill>
-                  <a:srgbClr val="E6EDF2"/>
+              <a:rPr lang="en-US" sz="1250" dirty="0">
+                <a:solidFill>
+                  <a:srgbClr val="8FB3A0"/>
                 </a:solidFill>
                 <a:latin typeface="Courier New" pitchFamily="34" charset="0"/>
                 <a:ea typeface="Courier New" pitchFamily="34" charset="-122"/>
                 <a:cs typeface="Courier New" pitchFamily="34" charset="-120"/>
               </a:rPr>
-              <a:t>    li   a5, PADDLE_Y</a:t>
-            </a:r>
-            <a:endParaRPr lang="en-US" sz="1100" dirty="0"/>
+              <a:t># a4..a7 = rettangolo della</a:t>
+            </a:r>
+            <a:endParaRPr lang="en-US" sz="1250" dirty="0"/>
           </a:p>
           <a:p>
             <a:pPr indent="0" marL="0">
               <a:buNone/>
             </a:pPr>
             <a:r>
-              <a:rPr lang="en-US" sz="1100" dirty="0">
+              <a:rPr lang="en-US" sz="1250" dirty="0">
                 <a:solidFill>
                   <a:srgbClr val="E6EDF2"/>
                 </a:solidFill>
@@ -31517,16 +31551,16 @@
                 <a:ea typeface="Courier New" pitchFamily="34" charset="-122"/>
                 <a:cs typeface="Courier New" pitchFamily="34" charset="-120"/>
               </a:rPr>
-              <a:t>    li   a6, PADDLE_W</a:t>
-            </a:r>
-            <a:endParaRPr lang="en-US" sz="1100" dirty="0"/>
+              <a:t>        racchetta</a:t>
+            </a:r>
+            <a:endParaRPr lang="en-US" sz="1250" dirty="0"/>
           </a:p>
           <a:p>
             <a:pPr indent="0" marL="0">
               <a:buNone/>
             </a:pPr>
             <a:r>
-              <a:rPr lang="en-US" sz="1100" dirty="0">
+              <a:rPr lang="en-US" sz="1250" dirty="0">
                 <a:solidFill>
                   <a:srgbClr val="E6EDF2"/>
                 </a:solidFill>
@@ -31534,16 +31568,16 @@
                 <a:ea typeface="Courier New" pitchFamily="34" charset="-122"/>
                 <a:cs typeface="Courier New" pitchFamily="34" charset="-120"/>
               </a:rPr>
-              <a:t>    li   a7, PADDLE_H</a:t>
-            </a:r>
-            <a:endParaRPr lang="en-US" sz="1100" dirty="0"/>
+              <a:t>    li   a5, PADDLE_Y</a:t>
+            </a:r>
+            <a:endParaRPr lang="en-US" sz="1250" dirty="0"/>
           </a:p>
           <a:p>
             <a:pPr indent="0" marL="0">
               <a:buNone/>
             </a:pPr>
             <a:r>
-              <a:rPr lang="en-US" sz="1100" dirty="0">
+              <a:rPr lang="en-US" sz="1250" dirty="0">
                 <a:solidFill>
                   <a:srgbClr val="E6EDF2"/>
                 </a:solidFill>
@@ -31551,30 +31585,33 @@
                 <a:ea typeface="Courier New" pitchFamily="34" charset="-122"/>
                 <a:cs typeface="Courier New" pitchFamily="34" charset="-120"/>
               </a:rPr>
-              <a:t>    call prg32_sprite_hitbox    </a:t>
-            </a:r>
+              <a:t>    li   a6, PADDLE_W</a:t>
+            </a:r>
+            <a:endParaRPr lang="en-US" sz="1250" dirty="0"/>
+          </a:p>
+          <a:p>
             <a:pPr indent="0" marL="0">
               <a:buNone/>
             </a:pPr>
             <a:r>
-              <a:rPr lang="en-US" sz="1100" dirty="0">
-                <a:solidFill>
-                  <a:srgbClr val="8FB3A0"/>
+              <a:rPr lang="en-US" sz="1250" dirty="0">
+                <a:solidFill>
+                  <a:srgbClr val="E6EDF2"/>
                 </a:solidFill>
                 <a:latin typeface="Courier New" pitchFamily="34" charset="0"/>
                 <a:ea typeface="Courier New" pitchFamily="34" charset="-122"/>
                 <a:cs typeface="Courier New" pitchFamily="34" charset="-120"/>
               </a:rPr>
-              <a:t># a0 != 0 se i due rettangoli si toccano</a:t>
-            </a:r>
-            <a:endParaRPr lang="en-US" sz="1100" dirty="0"/>
+              <a:t>    li   a7, PADDLE_H</a:t>
+            </a:r>
+            <a:endParaRPr lang="en-US" sz="1250" dirty="0"/>
           </a:p>
           <a:p>
             <a:pPr indent="0" marL="0">
               <a:buNone/>
             </a:pPr>
             <a:r>
-              <a:rPr lang="en-US" sz="1100" dirty="0">
+              <a:rPr lang="en-US" sz="1250" dirty="0">
                 <a:solidFill>
                   <a:srgbClr val="E6EDF2"/>
                 </a:solidFill>
@@ -31582,33 +31619,30 @@
                 <a:ea typeface="Courier New" pitchFamily="34" charset="-122"/>
                 <a:cs typeface="Courier New" pitchFamily="34" charset="-120"/>
               </a:rPr>
-              <a:t>    beqz a0, no_paddle_hit</a:t>
-            </a:r>
-            <a:endParaRPr lang="en-US" sz="1100" dirty="0"/>
-          </a:p>
-          <a:p>
+              <a:t>    call prg32_sprite_hitbox    </a:t>
+            </a:r>
             <a:pPr indent="0" marL="0">
               <a:buNone/>
             </a:pPr>
             <a:r>
-              <a:rPr lang="en-US" sz="1100" dirty="0">
-                <a:solidFill>
-                  <a:srgbClr val="E6EDF2"/>
+              <a:rPr lang="en-US" sz="1250" dirty="0">
+                <a:solidFill>
+                  <a:srgbClr val="8FB3A0"/>
                 </a:solidFill>
                 <a:latin typeface="Courier New" pitchFamily="34" charset="0"/>
                 <a:ea typeface="Courier New" pitchFamily="34" charset="-122"/>
                 <a:cs typeface="Courier New" pitchFamily="34" charset="-120"/>
               </a:rPr>
-              <a:t>    la   t0, ball_dy</a:t>
-            </a:r>
-            <a:endParaRPr lang="en-US" sz="1100" dirty="0"/>
+              <a:t># a0 != 0 se i due rettangoli si</a:t>
+            </a:r>
+            <a:endParaRPr lang="en-US" sz="1250" dirty="0"/>
           </a:p>
           <a:p>
             <a:pPr indent="0" marL="0">
               <a:buNone/>
             </a:pPr>
             <a:r>
-              <a:rPr lang="en-US" sz="1100" dirty="0">
+              <a:rPr lang="en-US" sz="1250" dirty="0">
                 <a:solidFill>
                   <a:srgbClr val="E6EDF2"/>
                 </a:solidFill>
@@ -31616,16 +31650,16 @@
                 <a:ea typeface="Courier New" pitchFamily="34" charset="-122"/>
                 <a:cs typeface="Courier New" pitchFamily="34" charset="-120"/>
               </a:rPr>
-              <a:t>    lw   t1, 0(t0)</a:t>
-            </a:r>
-            <a:endParaRPr lang="en-US" sz="1100" dirty="0"/>
+              <a:t>        toccano</a:t>
+            </a:r>
+            <a:endParaRPr lang="en-US" sz="1250" dirty="0"/>
           </a:p>
           <a:p>
             <a:pPr indent="0" marL="0">
               <a:buNone/>
             </a:pPr>
             <a:r>
-              <a:rPr lang="en-US" sz="1100" dirty="0">
+              <a:rPr lang="en-US" sz="1250" dirty="0">
                 <a:solidFill>
                   <a:srgbClr val="E6EDF2"/>
                 </a:solidFill>
@@ -31633,30 +31667,33 @@
                 <a:ea typeface="Courier New" pitchFamily="34" charset="-122"/>
                 <a:cs typeface="Courier New" pitchFamily="34" charset="-120"/>
               </a:rPr>
-              <a:t>    blez t1, no_paddle_hit      </a:t>
-            </a:r>
+              <a:t>    beqz a0, no_paddle_hit</a:t>
+            </a:r>
+            <a:endParaRPr lang="en-US" sz="1250" dirty="0"/>
+          </a:p>
+          <a:p>
             <a:pPr indent="0" marL="0">
               <a:buNone/>
             </a:pPr>
             <a:r>
-              <a:rPr lang="en-US" sz="1100" dirty="0">
-                <a:solidFill>
-                  <a:srgbClr val="8FB3A0"/>
+              <a:rPr lang="en-US" sz="1250" dirty="0">
+                <a:solidFill>
+                  <a:srgbClr val="E6EDF2"/>
                 </a:solidFill>
                 <a:latin typeface="Courier New" pitchFamily="34" charset="0"/>
                 <a:ea typeface="Courier New" pitchFamily="34" charset="-122"/>
                 <a:cs typeface="Courier New" pitchFamily="34" charset="-120"/>
               </a:rPr>
-              <a:t># rimbalza solo se sta scendendo</a:t>
-            </a:r>
-            <a:endParaRPr lang="en-US" sz="1100" dirty="0"/>
+              <a:t>    la   t0, ball_dy</a:t>
+            </a:r>
+            <a:endParaRPr lang="en-US" sz="1250" dirty="0"/>
           </a:p>
           <a:p>
             <a:pPr indent="0" marL="0">
               <a:buNone/>
             </a:pPr>
             <a:r>
-              <a:rPr lang="en-US" sz="1100" dirty="0">
+              <a:rPr lang="en-US" sz="1250" dirty="0">
                 <a:solidFill>
                   <a:srgbClr val="E6EDF2"/>
                 </a:solidFill>
@@ -31664,16 +31701,16 @@
                 <a:ea typeface="Courier New" pitchFamily="34" charset="-122"/>
                 <a:cs typeface="Courier New" pitchFamily="34" charset="-120"/>
               </a:rPr>
-              <a:t>    neg  t1, t1</a:t>
-            </a:r>
-            <a:endParaRPr lang="en-US" sz="1100" dirty="0"/>
+              <a:t>    lw   t1, 0(t0)</a:t>
+            </a:r>
+            <a:endParaRPr lang="en-US" sz="1250" dirty="0"/>
           </a:p>
           <a:p>
             <a:pPr indent="0" marL="0">
               <a:buNone/>
             </a:pPr>
             <a:r>
-              <a:rPr lang="en-US" sz="1100" dirty="0">
+              <a:rPr lang="en-US" sz="1250" dirty="0">
                 <a:solidFill>
                   <a:srgbClr val="E6EDF2"/>
                 </a:solidFill>
@@ -31681,9 +31718,57 @@
                 <a:ea typeface="Courier New" pitchFamily="34" charset="-122"/>
                 <a:cs typeface="Courier New" pitchFamily="34" charset="-120"/>
               </a:rPr>
+              <a:t>    blez t1, no_paddle_hit      </a:t>
+            </a:r>
+            <a:pPr indent="0" marL="0">
+              <a:buNone/>
+            </a:pPr>
+            <a:r>
+              <a:rPr lang="en-US" sz="1250" dirty="0">
+                <a:solidFill>
+                  <a:srgbClr val="8FB3A0"/>
+                </a:solidFill>
+                <a:latin typeface="Courier New" pitchFamily="34" charset="0"/>
+                <a:ea typeface="Courier New" pitchFamily="34" charset="-122"/>
+                <a:cs typeface="Courier New" pitchFamily="34" charset="-120"/>
+              </a:rPr>
+              <a:t># rimbalza solo se sta scendendo</a:t>
+            </a:r>
+            <a:endParaRPr lang="en-US" sz="1250" dirty="0"/>
+          </a:p>
+          <a:p>
+            <a:pPr indent="0" marL="0">
+              <a:buNone/>
+            </a:pPr>
+            <a:r>
+              <a:rPr lang="en-US" sz="1250" dirty="0">
+                <a:solidFill>
+                  <a:srgbClr val="E6EDF2"/>
+                </a:solidFill>
+                <a:latin typeface="Courier New" pitchFamily="34" charset="0"/>
+                <a:ea typeface="Courier New" pitchFamily="34" charset="-122"/>
+                <a:cs typeface="Courier New" pitchFamily="34" charset="-120"/>
+              </a:rPr>
+              <a:t>    neg  t1, t1</a:t>
+            </a:r>
+            <a:endParaRPr lang="en-US" sz="1250" dirty="0"/>
+          </a:p>
+          <a:p>
+            <a:pPr indent="0" marL="0">
+              <a:buNone/>
+            </a:pPr>
+            <a:r>
+              <a:rPr lang="en-US" sz="1250" dirty="0">
+                <a:solidFill>
+                  <a:srgbClr val="E6EDF2"/>
+                </a:solidFill>
+                <a:latin typeface="Courier New" pitchFamily="34" charset="0"/>
+                <a:ea typeface="Courier New" pitchFamily="34" charset="-122"/>
+                <a:cs typeface="Courier New" pitchFamily="34" charset="-120"/>
+              </a:rPr>
               <a:t>    sw   t1, 0(t0)</a:t>
             </a:r>
-            <a:endParaRPr lang="en-US" sz="1100" dirty="0"/>
+            <a:endParaRPr lang="en-US" sz="1250" dirty="0"/>
           </a:p>
         </p:txBody>
       </p:sp>
@@ -35422,7 +35507,7 @@
               <a:buNone/>
             </a:pPr>
             <a:r>
-              <a:rPr lang="en-US" sz="1200" dirty="0">
+              <a:rPr lang="en-US" sz="1250" dirty="0">
                 <a:solidFill>
                   <a:srgbClr val="E6EDF2"/>
                 </a:solidFill>
@@ -35436,7 +35521,7 @@
               <a:buNone/>
             </a:pPr>
             <a:r>
-              <a:rPr lang="en-US" sz="1200" dirty="0">
+              <a:rPr lang="en-US" sz="1250" dirty="0">
                 <a:solidFill>
                   <a:srgbClr val="8FB3A0"/>
                 </a:solidFill>
@@ -35446,14 +35531,14 @@
               </a:rPr>
               <a:t># --- la pallina tocca un mattoncino?</a:t>
             </a:r>
-            <a:endParaRPr lang="en-US" sz="1200" dirty="0"/>
+            <a:endParaRPr lang="en-US" sz="1250" dirty="0"/>
           </a:p>
           <a:p>
             <a:pPr indent="0" marL="0">
               <a:buNone/>
             </a:pPr>
             <a:r>
-              <a:rPr lang="en-US" sz="1200" dirty="0">
+              <a:rPr lang="en-US" sz="1250" dirty="0">
                 <a:solidFill>
                   <a:srgbClr val="E6EDF2"/>
                 </a:solidFill>
@@ -35467,7 +35552,7 @@
               <a:buNone/>
             </a:pPr>
             <a:r>
-              <a:rPr lang="en-US" sz="1200" dirty="0">
+              <a:rPr lang="en-US" sz="1250" dirty="0">
                 <a:solidFill>
                   <a:srgbClr val="8FB3A0"/>
                 </a:solidFill>
@@ -35475,16 +35560,16 @@
                 <a:ea typeface="Courier New" pitchFamily="34" charset="-122"/>
                 <a:cs typeface="Courier New" pitchFamily="34" charset="-120"/>
               </a:rPr>
-              <a:t># s0 = indice del mattoncino (0..15)</a:t>
-            </a:r>
-            <a:endParaRPr lang="en-US" sz="1200" dirty="0"/>
+              <a:t># s0 = indice del mattoncino</a:t>
+            </a:r>
+            <a:endParaRPr lang="en-US" sz="1250" dirty="0"/>
           </a:p>
           <a:p>
             <a:pPr indent="0" marL="0">
               <a:buNone/>
             </a:pPr>
             <a:r>
-              <a:rPr lang="en-US" sz="1200" dirty="0">
+              <a:rPr lang="en-US" sz="1250" dirty="0">
                 <a:solidFill>
                   <a:srgbClr val="E6EDF2"/>
                 </a:solidFill>
@@ -35492,16 +35577,16 @@
                 <a:ea typeface="Courier New" pitchFamily="34" charset="-122"/>
                 <a:cs typeface="Courier New" pitchFamily="34" charset="-120"/>
               </a:rPr>
-              <a:t>brick_loop:</a:t>
-            </a:r>
-            <a:endParaRPr lang="en-US" sz="1200" dirty="0"/>
+              <a:t>        (0..15)</a:t>
+            </a:r>
+            <a:endParaRPr lang="en-US" sz="1250" dirty="0"/>
           </a:p>
           <a:p>
             <a:pPr indent="0" marL="0">
               <a:buNone/>
             </a:pPr>
             <a:r>
-              <a:rPr lang="en-US" sz="1200" dirty="0">
+              <a:rPr lang="en-US" sz="1250" dirty="0">
                 <a:solidFill>
                   <a:srgbClr val="E6EDF2"/>
                 </a:solidFill>
@@ -35509,16 +35594,16 @@
                 <a:ea typeface="Courier New" pitchFamily="34" charset="-122"/>
                 <a:cs typeface="Courier New" pitchFamily="34" charset="-120"/>
               </a:rPr>
-              <a:t>    la   t0, bricks</a:t>
-            </a:r>
-            <a:endParaRPr lang="en-US" sz="1200" dirty="0"/>
+              <a:t>brick_loop:</a:t>
+            </a:r>
+            <a:endParaRPr lang="en-US" sz="1250" dirty="0"/>
           </a:p>
           <a:p>
             <a:pPr indent="0" marL="0">
               <a:buNone/>
             </a:pPr>
             <a:r>
-              <a:rPr lang="en-US" sz="1200" dirty="0">
+              <a:rPr lang="en-US" sz="1250" dirty="0">
                 <a:solidFill>
                   <a:srgbClr val="E6EDF2"/>
                 </a:solidFill>
@@ -35526,16 +35611,16 @@
                 <a:ea typeface="Courier New" pitchFamily="34" charset="-122"/>
                 <a:cs typeface="Courier New" pitchFamily="34" charset="-120"/>
               </a:rPr>
-              <a:t>    add  t0, t0, s0</a:t>
-            </a:r>
-            <a:endParaRPr lang="en-US" sz="1200" dirty="0"/>
+              <a:t>    la   t0, bricks</a:t>
+            </a:r>
+            <a:endParaRPr lang="en-US" sz="1250" dirty="0"/>
           </a:p>
           <a:p>
             <a:pPr indent="0" marL="0">
               <a:buNone/>
             </a:pPr>
             <a:r>
-              <a:rPr lang="en-US" sz="1200" dirty="0">
+              <a:rPr lang="en-US" sz="1250" dirty="0">
                 <a:solidFill>
                   <a:srgbClr val="E6EDF2"/>
                 </a:solidFill>
@@ -35543,47 +35628,47 @@
                 <a:ea typeface="Courier New" pitchFamily="34" charset="-122"/>
                 <a:cs typeface="Courier New" pitchFamily="34" charset="-120"/>
               </a:rPr>
-              <a:t>    lbu  t1, 0(t0)              </a:t>
-            </a:r>
+              <a:t>    add  t0, t0, s0</a:t>
+            </a:r>
+            <a:endParaRPr lang="en-US" sz="1250" dirty="0"/>
+          </a:p>
+          <a:p>
             <a:pPr indent="0" marL="0">
               <a:buNone/>
             </a:pPr>
             <a:r>
-              <a:rPr lang="en-US" sz="1200" dirty="0">
-                <a:solidFill>
-                  <a:srgbClr val="8FB3A0"/>
+              <a:rPr lang="en-US" sz="1250" dirty="0">
+                <a:solidFill>
+                  <a:srgbClr val="E6EDF2"/>
                 </a:solidFill>
                 <a:latin typeface="Courier New" pitchFamily="34" charset="0"/>
                 <a:ea typeface="Courier New" pitchFamily="34" charset="-122"/>
                 <a:cs typeface="Courier New" pitchFamily="34" charset="-120"/>
               </a:rPr>
-              <a:t># 1 = presente, 0 = distrutto</a:t>
-            </a:r>
-            <a:endParaRPr lang="en-US" sz="1200" dirty="0"/>
-          </a:p>
-          <a:p>
+              <a:t>    lbu  t1, 0(t0)              </a:t>
+            </a:r>
             <a:pPr indent="0" marL="0">
               <a:buNone/>
             </a:pPr>
             <a:r>
-              <a:rPr lang="en-US" sz="1200" dirty="0">
-                <a:solidFill>
-                  <a:srgbClr val="E6EDF2"/>
+              <a:rPr lang="en-US" sz="1250" dirty="0">
+                <a:solidFill>
+                  <a:srgbClr val="8FB3A0"/>
                 </a:solidFill>
                 <a:latin typeface="Courier New" pitchFamily="34" charset="0"/>
                 <a:ea typeface="Courier New" pitchFamily="34" charset="-122"/>
                 <a:cs typeface="Courier New" pitchFamily="34" charset="-120"/>
               </a:rPr>
-              <a:t>    beqz t1, brick_next</a:t>
-            </a:r>
-            <a:endParaRPr lang="en-US" sz="1200" dirty="0"/>
+              <a:t># 1 = presente, 0 = distrutto</a:t>
+            </a:r>
+            <a:endParaRPr lang="en-US" sz="1250" dirty="0"/>
           </a:p>
           <a:p>
             <a:pPr indent="0" marL="0">
               <a:buNone/>
             </a:pPr>
             <a:r>
-              <a:rPr lang="en-US" sz="1200" dirty="0">
+              <a:rPr lang="en-US" sz="1250" dirty="0">
                 <a:solidFill>
                   <a:srgbClr val="E6EDF2"/>
                 </a:solidFill>
@@ -35591,16 +35676,16 @@
                 <a:ea typeface="Courier New" pitchFamily="34" charset="-122"/>
                 <a:cs typeface="Courier New" pitchFamily="34" charset="-120"/>
               </a:rPr>
-              <a:t>    la   t0, ball_x</a:t>
-            </a:r>
-            <a:endParaRPr lang="en-US" sz="1200" dirty="0"/>
+              <a:t>    beqz t1, brick_next</a:t>
+            </a:r>
+            <a:endParaRPr lang="en-US" sz="1250" dirty="0"/>
           </a:p>
           <a:p>
             <a:pPr indent="0" marL="0">
               <a:buNone/>
             </a:pPr>
             <a:r>
-              <a:rPr lang="en-US" sz="1200" dirty="0">
+              <a:rPr lang="en-US" sz="1250" dirty="0">
                 <a:solidFill>
                   <a:srgbClr val="E6EDF2"/>
                 </a:solidFill>
@@ -35608,16 +35693,16 @@
                 <a:ea typeface="Courier New" pitchFamily="34" charset="-122"/>
                 <a:cs typeface="Courier New" pitchFamily="34" charset="-120"/>
               </a:rPr>
-              <a:t>    lw   a0, 0(t0)</a:t>
-            </a:r>
-            <a:endParaRPr lang="en-US" sz="1200" dirty="0"/>
+              <a:t>    la   t0, ball_x</a:t>
+            </a:r>
+            <a:endParaRPr lang="en-US" sz="1250" dirty="0"/>
           </a:p>
           <a:p>
             <a:pPr indent="0" marL="0">
               <a:buNone/>
             </a:pPr>
             <a:r>
-              <a:rPr lang="en-US" sz="1200" dirty="0">
+              <a:rPr lang="en-US" sz="1250" dirty="0">
                 <a:solidFill>
                   <a:srgbClr val="E6EDF2"/>
                 </a:solidFill>
@@ -35625,16 +35710,16 @@
                 <a:ea typeface="Courier New" pitchFamily="34" charset="-122"/>
                 <a:cs typeface="Courier New" pitchFamily="34" charset="-120"/>
               </a:rPr>
-              <a:t>    la   t0, ball_y</a:t>
-            </a:r>
-            <a:endParaRPr lang="en-US" sz="1200" dirty="0"/>
+              <a:t>    lw   a0, 0(t0)</a:t>
+            </a:r>
+            <a:endParaRPr lang="en-US" sz="1250" dirty="0"/>
           </a:p>
           <a:p>
             <a:pPr indent="0" marL="0">
               <a:buNone/>
             </a:pPr>
             <a:r>
-              <a:rPr lang="en-US" sz="1200" dirty="0">
+              <a:rPr lang="en-US" sz="1250" dirty="0">
                 <a:solidFill>
                   <a:srgbClr val="E6EDF2"/>
                 </a:solidFill>
@@ -35642,16 +35727,16 @@
                 <a:ea typeface="Courier New" pitchFamily="34" charset="-122"/>
                 <a:cs typeface="Courier New" pitchFamily="34" charset="-120"/>
               </a:rPr>
-              <a:t>    lw   a1, 0(t0)</a:t>
-            </a:r>
-            <a:endParaRPr lang="en-US" sz="1200" dirty="0"/>
+              <a:t>    la   t0, ball_y</a:t>
+            </a:r>
+            <a:endParaRPr lang="en-US" sz="1250" dirty="0"/>
           </a:p>
           <a:p>
             <a:pPr indent="0" marL="0">
               <a:buNone/>
             </a:pPr>
             <a:r>
-              <a:rPr lang="en-US" sz="1200" dirty="0">
+              <a:rPr lang="en-US" sz="1250" dirty="0">
                 <a:solidFill>
                   <a:srgbClr val="E6EDF2"/>
                 </a:solidFill>
@@ -35659,16 +35744,16 @@
                 <a:ea typeface="Courier New" pitchFamily="34" charset="-122"/>
                 <a:cs typeface="Courier New" pitchFamily="34" charset="-120"/>
               </a:rPr>
-              <a:t>    li   a2, BALL_SIZE</a:t>
-            </a:r>
-            <a:endParaRPr lang="en-US" sz="1200" dirty="0"/>
+              <a:t>    lw   a1, 0(t0)</a:t>
+            </a:r>
+            <a:endParaRPr lang="en-US" sz="1250" dirty="0"/>
           </a:p>
           <a:p>
             <a:pPr indent="0" marL="0">
               <a:buNone/>
             </a:pPr>
             <a:r>
-              <a:rPr lang="en-US" sz="1200" dirty="0">
+              <a:rPr lang="en-US" sz="1250" dirty="0">
                 <a:solidFill>
                   <a:srgbClr val="E6EDF2"/>
                 </a:solidFill>
@@ -35676,16 +35761,16 @@
                 <a:ea typeface="Courier New" pitchFamily="34" charset="-122"/>
                 <a:cs typeface="Courier New" pitchFamily="34" charset="-120"/>
               </a:rPr>
-              <a:t>    li   a3, BALL_SIZE</a:t>
-            </a:r>
-            <a:endParaRPr lang="en-US" sz="1200" dirty="0"/>
+              <a:t>    li   a2, BALL_SIZE</a:t>
+            </a:r>
+            <a:endParaRPr lang="en-US" sz="1250" dirty="0"/>
           </a:p>
           <a:p>
             <a:pPr indent="0" marL="0">
               <a:buNone/>
             </a:pPr>
             <a:r>
-              <a:rPr lang="en-US" sz="1200" dirty="0">
+              <a:rPr lang="en-US" sz="1250" dirty="0">
                 <a:solidFill>
                   <a:srgbClr val="E6EDF2"/>
                 </a:solidFill>
@@ -35693,47 +35778,47 @@
                 <a:ea typeface="Courier New" pitchFamily="34" charset="-122"/>
                 <a:cs typeface="Courier New" pitchFamily="34" charset="-120"/>
               </a:rPr>
-              <a:t>    andi t2, s0, 7              </a:t>
-            </a:r>
+              <a:t>    li   a3, BALL_SIZE</a:t>
+            </a:r>
+            <a:endParaRPr lang="en-US" sz="1250" dirty="0"/>
+          </a:p>
+          <a:p>
             <a:pPr indent="0" marL="0">
               <a:buNone/>
             </a:pPr>
             <a:r>
-              <a:rPr lang="en-US" sz="1200" dirty="0">
-                <a:solidFill>
-                  <a:srgbClr val="8FB3A0"/>
+              <a:rPr lang="en-US" sz="1250" dirty="0">
+                <a:solidFill>
+                  <a:srgbClr val="E6EDF2"/>
                 </a:solidFill>
                 <a:latin typeface="Courier New" pitchFamily="34" charset="0"/>
                 <a:ea typeface="Courier New" pitchFamily="34" charset="-122"/>
                 <a:cs typeface="Courier New" pitchFamily="34" charset="-120"/>
               </a:rPr>
-              <a:t># colonna = indice AND 7   (0..7)</a:t>
-            </a:r>
-            <a:endParaRPr lang="en-US" sz="1200" dirty="0"/>
-          </a:p>
-          <a:p>
+              <a:t>    andi t2, s0, 7              </a:t>
+            </a:r>
             <a:pPr indent="0" marL="0">
               <a:buNone/>
             </a:pPr>
             <a:r>
-              <a:rPr lang="en-US" sz="1200" dirty="0">
-                <a:solidFill>
-                  <a:srgbClr val="E6EDF2"/>
+              <a:rPr lang="en-US" sz="1250" dirty="0">
+                <a:solidFill>
+                  <a:srgbClr val="8FB3A0"/>
                 </a:solidFill>
                 <a:latin typeface="Courier New" pitchFamily="34" charset="0"/>
                 <a:ea typeface="Courier New" pitchFamily="34" charset="-122"/>
                 <a:cs typeface="Courier New" pitchFamily="34" charset="-120"/>
               </a:rPr>
-              <a:t>    li   t3, BRICK_PITCH_X</a:t>
-            </a:r>
-            <a:endParaRPr lang="en-US" sz="1200" dirty="0"/>
+              <a:t># colonna = indice AND 7   (0..7)</a:t>
+            </a:r>
+            <a:endParaRPr lang="en-US" sz="1250" dirty="0"/>
           </a:p>
           <a:p>
             <a:pPr indent="0" marL="0">
               <a:buNone/>
             </a:pPr>
             <a:r>
-              <a:rPr lang="en-US" sz="1200" dirty="0">
+              <a:rPr lang="en-US" sz="1250" dirty="0">
                 <a:solidFill>
                   <a:srgbClr val="E6EDF2"/>
                 </a:solidFill>
@@ -35741,16 +35826,16 @@
                 <a:ea typeface="Courier New" pitchFamily="34" charset="-122"/>
                 <a:cs typeface="Courier New" pitchFamily="34" charset="-120"/>
               </a:rPr>
-              <a:t>    mul  a4, t2, t3</a:t>
-            </a:r>
-            <a:endParaRPr lang="en-US" sz="1200" dirty="0"/>
+              <a:t>    li   t3, BRICK_PITCH_X</a:t>
+            </a:r>
+            <a:endParaRPr lang="en-US" sz="1250" dirty="0"/>
           </a:p>
           <a:p>
             <a:pPr indent="0" marL="0">
               <a:buNone/>
             </a:pPr>
             <a:r>
-              <a:rPr lang="en-US" sz="1200" dirty="0">
+              <a:rPr lang="en-US" sz="1250" dirty="0">
                 <a:solidFill>
                   <a:srgbClr val="E6EDF2"/>
                 </a:solidFill>
@@ -35758,78 +35843,78 @@
                 <a:ea typeface="Courier New" pitchFamily="34" charset="-122"/>
                 <a:cs typeface="Courier New" pitchFamily="34" charset="-120"/>
               </a:rPr>
-              <a:t>    addi a4, a4, 2              </a:t>
-            </a:r>
+              <a:t>    mul  a4, t2, t3</a:t>
+            </a:r>
+            <a:endParaRPr lang="en-US" sz="1250" dirty="0"/>
+          </a:p>
+          <a:p>
             <a:pPr indent="0" marL="0">
               <a:buNone/>
             </a:pPr>
             <a:r>
-              <a:rPr lang="en-US" sz="1200" dirty="0">
-                <a:solidFill>
-                  <a:srgbClr val="8FB3A0"/>
+              <a:rPr lang="en-US" sz="1250" dirty="0">
+                <a:solidFill>
+                  <a:srgbClr val="E6EDF2"/>
                 </a:solidFill>
                 <a:latin typeface="Courier New" pitchFamily="34" charset="0"/>
                 <a:ea typeface="Courier New" pitchFamily="34" charset="-122"/>
                 <a:cs typeface="Courier New" pitchFamily="34" charset="-120"/>
               </a:rPr>
-              <a:t># x = 2 + colonna * 40</a:t>
-            </a:r>
-            <a:endParaRPr lang="en-US" sz="1200" dirty="0"/>
-          </a:p>
-          <a:p>
+              <a:t>    addi a4, a4, 2              </a:t>
+            </a:r>
             <a:pPr indent="0" marL="0">
               <a:buNone/>
             </a:pPr>
             <a:r>
-              <a:rPr lang="en-US" sz="1200" dirty="0">
-                <a:solidFill>
-                  <a:srgbClr val="E6EDF2"/>
+              <a:rPr lang="en-US" sz="1250" dirty="0">
+                <a:solidFill>
+                  <a:srgbClr val="8FB3A0"/>
                 </a:solidFill>
                 <a:latin typeface="Courier New" pitchFamily="34" charset="0"/>
                 <a:ea typeface="Courier New" pitchFamily="34" charset="-122"/>
                 <a:cs typeface="Courier New" pitchFamily="34" charset="-120"/>
               </a:rPr>
-              <a:t>    srli t2, s0, 3              </a:t>
-            </a:r>
+              <a:t># x = 2 + colonna * 40</a:t>
+            </a:r>
+            <a:endParaRPr lang="en-US" sz="1250" dirty="0"/>
+          </a:p>
+          <a:p>
             <a:pPr indent="0" marL="0">
               <a:buNone/>
             </a:pPr>
             <a:r>
-              <a:rPr lang="en-US" sz="1200" dirty="0">
-                <a:solidFill>
-                  <a:srgbClr val="8FB3A0"/>
+              <a:rPr lang="en-US" sz="1250" dirty="0">
+                <a:solidFill>
+                  <a:srgbClr val="E6EDF2"/>
                 </a:solidFill>
                 <a:latin typeface="Courier New" pitchFamily="34" charset="0"/>
                 <a:ea typeface="Courier New" pitchFamily="34" charset="-122"/>
                 <a:cs typeface="Courier New" pitchFamily="34" charset="-120"/>
               </a:rPr>
-              <a:t># riga = indice / 8        (0..1)</a:t>
-            </a:r>
-            <a:endParaRPr lang="en-US" sz="1200" dirty="0"/>
-          </a:p>
-          <a:p>
+              <a:t>    srli t2, s0, 3              </a:t>
+            </a:r>
             <a:pPr indent="0" marL="0">
               <a:buNone/>
             </a:pPr>
             <a:r>
-              <a:rPr lang="en-US" sz="1200" dirty="0">
-                <a:solidFill>
-                  <a:srgbClr val="E6EDF2"/>
+              <a:rPr lang="en-US" sz="1250" dirty="0">
+                <a:solidFill>
+                  <a:srgbClr val="8FB3A0"/>
                 </a:solidFill>
                 <a:latin typeface="Courier New" pitchFamily="34" charset="0"/>
                 <a:ea typeface="Courier New" pitchFamily="34" charset="-122"/>
                 <a:cs typeface="Courier New" pitchFamily="34" charset="-120"/>
               </a:rPr>
-              <a:t>    li   t3, BRICK_PITCH_Y</a:t>
-            </a:r>
-            <a:endParaRPr lang="en-US" sz="1200" dirty="0"/>
+              <a:t># riga = indice / 8        (0..1)</a:t>
+            </a:r>
+            <a:endParaRPr lang="en-US" sz="1250" dirty="0"/>
           </a:p>
           <a:p>
             <a:pPr indent="0" marL="0">
               <a:buNone/>
             </a:pPr>
             <a:r>
-              <a:rPr lang="en-US" sz="1200" dirty="0">
+              <a:rPr lang="en-US" sz="1250" dirty="0">
                 <a:solidFill>
                   <a:srgbClr val="E6EDF2"/>
                 </a:solidFill>
@@ -35837,16 +35922,16 @@
                 <a:ea typeface="Courier New" pitchFamily="34" charset="-122"/>
                 <a:cs typeface="Courier New" pitchFamily="34" charset="-120"/>
               </a:rPr>
-              <a:t>    mul  a5, t2, t3</a:t>
-            </a:r>
-            <a:endParaRPr lang="en-US" sz="1200" dirty="0"/>
+              <a:t>    li   t3, BRICK_PITCH_Y</a:t>
+            </a:r>
+            <a:endParaRPr lang="en-US" sz="1250" dirty="0"/>
           </a:p>
           <a:p>
             <a:pPr indent="0" marL="0">
               <a:buNone/>
             </a:pPr>
             <a:r>
-              <a:rPr lang="en-US" sz="1200" dirty="0">
+              <a:rPr lang="en-US" sz="1250" dirty="0">
                 <a:solidFill>
                   <a:srgbClr val="E6EDF2"/>
                 </a:solidFill>
@@ -35854,40 +35939,57 @@
                 <a:ea typeface="Courier New" pitchFamily="34" charset="-122"/>
                 <a:cs typeface="Courier New" pitchFamily="34" charset="-120"/>
               </a:rPr>
-              <a:t>    addi a5, a5, BRICK_TOP      </a:t>
-            </a:r>
+              <a:t>    mul  a5, t2, t3</a:t>
+            </a:r>
+            <a:endParaRPr lang="en-US" sz="1250" dirty="0"/>
+          </a:p>
+          <a:p>
             <a:pPr indent="0" marL="0">
               <a:buNone/>
             </a:pPr>
             <a:r>
-              <a:rPr lang="en-US" sz="1200" dirty="0">
-                <a:solidFill>
-                  <a:srgbClr val="8FB3A0"/>
+              <a:rPr lang="en-US" sz="1250" dirty="0">
+                <a:solidFill>
+                  <a:srgbClr val="E6EDF2"/>
                 </a:solidFill>
                 <a:latin typeface="Courier New" pitchFamily="34" charset="0"/>
                 <a:ea typeface="Courier New" pitchFamily="34" charset="-122"/>
                 <a:cs typeface="Courier New" pitchFamily="34" charset="-120"/>
               </a:rPr>
-              <a:t># y = 24 + riga * 14</a:t>
-            </a:r>
-            <a:endParaRPr lang="en-US" sz="1200" dirty="0"/>
-          </a:p>
-          <a:p>
+              <a:t>    addi a5, a5, BRICK_TOP      </a:t>
+            </a:r>
             <a:pPr indent="0" marL="0">
               <a:buNone/>
             </a:pPr>
             <a:r>
-              <a:rPr lang="en-US" sz="1200" dirty="0">
-                <a:solidFill>
-                  <a:srgbClr val="E6EDF2"/>
+              <a:rPr lang="en-US" sz="1250" dirty="0">
+                <a:solidFill>
+                  <a:srgbClr val="8FB3A0"/>
                 </a:solidFill>
                 <a:latin typeface="Courier New" pitchFamily="34" charset="0"/>
                 <a:ea typeface="Courier New" pitchFamily="34" charset="-122"/>
                 <a:cs typeface="Courier New" pitchFamily="34" charset="-120"/>
               </a:rPr>
+              <a:t># y = 24 + riga * 14</a:t>
+            </a:r>
+            <a:endParaRPr lang="en-US" sz="1250" dirty="0"/>
+          </a:p>
+          <a:p>
+            <a:pPr indent="0" marL="0">
+              <a:buNone/>
+            </a:pPr>
+            <a:r>
+              <a:rPr lang="en-US" sz="1250" dirty="0">
+                <a:solidFill>
+                  <a:srgbClr val="E6EDF2"/>
+                </a:solidFill>
+                <a:latin typeface="Courier New" pitchFamily="34" charset="0"/>
+                <a:ea typeface="Courier New" pitchFamily="34" charset="-122"/>
+                <a:cs typeface="Courier New" pitchFamily="34" charset="-120"/>
+              </a:rPr>
               <a:t>    li   a6, BRICK_W</a:t>
             </a:r>
-            <a:endParaRPr lang="en-US" sz="1200" dirty="0"/>
+            <a:endParaRPr lang="en-US" sz="1250" dirty="0"/>
           </a:p>
         </p:txBody>
       </p:sp>
@@ -36211,7 +36313,7 @@
               <a:buNone/>
             </a:pPr>
             <a:r>
-              <a:rPr lang="en-US" sz="1150" dirty="0">
+              <a:rPr lang="en-US" sz="1350" dirty="0">
                 <a:solidFill>
                   <a:srgbClr val="E6EDF2"/>
                 </a:solidFill>
@@ -36225,7 +36327,7 @@
               <a:buNone/>
             </a:pPr>
             <a:r>
-              <a:rPr lang="en-US" sz="1150" dirty="0">
+              <a:rPr lang="en-US" sz="1350" dirty="0">
                 <a:solidFill>
                   <a:srgbClr val="8FB3A0"/>
                 </a:solidFill>
@@ -36235,14 +36337,14 @@
               </a:rPr>
               <a:t># il mattoncino sparisce</a:t>
             </a:r>
-            <a:endParaRPr lang="en-US" sz="1150" dirty="0"/>
+            <a:endParaRPr lang="en-US" sz="1350" dirty="0"/>
           </a:p>
           <a:p>
             <a:pPr indent="0" marL="0">
               <a:buNone/>
             </a:pPr>
             <a:r>
-              <a:rPr lang="en-US" sz="1150" dirty="0">
+              <a:rPr lang="en-US" sz="1350" dirty="0">
                 <a:solidFill>
                   <a:srgbClr val="E6EDF2"/>
                 </a:solidFill>
@@ -36252,14 +36354,14 @@
               </a:rPr>
               <a:t>    la   t0, ball_dy</a:t>
             </a:r>
-            <a:endParaRPr lang="en-US" sz="1150" dirty="0"/>
+            <a:endParaRPr lang="en-US" sz="1350" dirty="0"/>
           </a:p>
           <a:p>
             <a:pPr indent="0" marL="0">
               <a:buNone/>
             </a:pPr>
             <a:r>
-              <a:rPr lang="en-US" sz="1150" dirty="0">
+              <a:rPr lang="en-US" sz="1350" dirty="0">
                 <a:solidFill>
                   <a:srgbClr val="E6EDF2"/>
                 </a:solidFill>
@@ -36269,14 +36371,14 @@
               </a:rPr>
               <a:t>    lw   t1, 0(t0)</a:t>
             </a:r>
-            <a:endParaRPr lang="en-US" sz="1150" dirty="0"/>
+            <a:endParaRPr lang="en-US" sz="1350" dirty="0"/>
           </a:p>
           <a:p>
             <a:pPr indent="0" marL="0">
               <a:buNone/>
             </a:pPr>
             <a:r>
-              <a:rPr lang="en-US" sz="1150" dirty="0">
+              <a:rPr lang="en-US" sz="1350" dirty="0">
                 <a:solidFill>
                   <a:srgbClr val="E6EDF2"/>
                 </a:solidFill>
@@ -36290,7 +36392,7 @@
               <a:buNone/>
             </a:pPr>
             <a:r>
-              <a:rPr lang="en-US" sz="1150" dirty="0">
+              <a:rPr lang="en-US" sz="1350" dirty="0">
                 <a:solidFill>
                   <a:srgbClr val="8FB3A0"/>
                 </a:solidFill>
@@ -36300,14 +36402,14 @@
               </a:rPr>
               <a:t># la pallina torna indietro</a:t>
             </a:r>
-            <a:endParaRPr lang="en-US" sz="1150" dirty="0"/>
+            <a:endParaRPr lang="en-US" sz="1350" dirty="0"/>
           </a:p>
           <a:p>
             <a:pPr indent="0" marL="0">
               <a:buNone/>
             </a:pPr>
             <a:r>
-              <a:rPr lang="en-US" sz="1150" dirty="0">
+              <a:rPr lang="en-US" sz="1350" dirty="0">
                 <a:solidFill>
                   <a:srgbClr val="E6EDF2"/>
                 </a:solidFill>
@@ -36317,14 +36419,14 @@
               </a:rPr>
               <a:t>    sw   t1, 0(t0)</a:t>
             </a:r>
-            <a:endParaRPr lang="en-US" sz="1150" dirty="0"/>
+            <a:endParaRPr lang="en-US" sz="1350" dirty="0"/>
           </a:p>
           <a:p>
             <a:pPr indent="0" marL="0">
               <a:buNone/>
             </a:pPr>
             <a:r>
-              <a:rPr lang="en-US" sz="1150" dirty="0">
+              <a:rPr lang="en-US" sz="1350" dirty="0">
                 <a:solidFill>
                   <a:srgbClr val="E6EDF2"/>
                 </a:solidFill>
@@ -36334,14 +36436,14 @@
               </a:rPr>
               <a:t>    la   t0, score</a:t>
             </a:r>
-            <a:endParaRPr lang="en-US" sz="1150" dirty="0"/>
+            <a:endParaRPr lang="en-US" sz="1350" dirty="0"/>
           </a:p>
           <a:p>
             <a:pPr indent="0" marL="0">
               <a:buNone/>
             </a:pPr>
             <a:r>
-              <a:rPr lang="en-US" sz="1150" dirty="0">
+              <a:rPr lang="en-US" sz="1350" dirty="0">
                 <a:solidFill>
                   <a:srgbClr val="E6EDF2"/>
                 </a:solidFill>
@@ -36351,14 +36453,14 @@
               </a:rPr>
               <a:t>    lw   t1, 0(t0)</a:t>
             </a:r>
-            <a:endParaRPr lang="en-US" sz="1150" dirty="0"/>
+            <a:endParaRPr lang="en-US" sz="1350" dirty="0"/>
           </a:p>
           <a:p>
             <a:pPr indent="0" marL="0">
               <a:buNone/>
             </a:pPr>
             <a:r>
-              <a:rPr lang="en-US" sz="1150" dirty="0">
+              <a:rPr lang="en-US" sz="1350" dirty="0">
                 <a:solidFill>
                   <a:srgbClr val="E6EDF2"/>
                 </a:solidFill>
@@ -36372,7 +36474,7 @@
               <a:buNone/>
             </a:pPr>
             <a:r>
-              <a:rPr lang="en-US" sz="1150" dirty="0">
+              <a:rPr lang="en-US" sz="1350" dirty="0">
                 <a:solidFill>
                   <a:srgbClr val="8FB3A0"/>
                 </a:solidFill>
@@ -36382,14 +36484,14 @@
               </a:rPr>
               <a:t># un punto</a:t>
             </a:r>
-            <a:endParaRPr lang="en-US" sz="1150" dirty="0"/>
+            <a:endParaRPr lang="en-US" sz="1350" dirty="0"/>
           </a:p>
           <a:p>
             <a:pPr indent="0" marL="0">
               <a:buNone/>
             </a:pPr>
             <a:r>
-              <a:rPr lang="en-US" sz="1150" dirty="0">
+              <a:rPr lang="en-US" sz="1350" dirty="0">
                 <a:solidFill>
                   <a:srgbClr val="E6EDF2"/>
                 </a:solidFill>
@@ -36399,14 +36501,14 @@
               </a:rPr>
               <a:t>    sw   t1, 0(t0)</a:t>
             </a:r>
-            <a:endParaRPr lang="en-US" sz="1150" dirty="0"/>
+            <a:endParaRPr lang="en-US" sz="1350" dirty="0"/>
           </a:p>
           <a:p>
             <a:pPr indent="0" marL="0">
               <a:buNone/>
             </a:pPr>
             <a:r>
-              <a:rPr lang="en-US" sz="1150" dirty="0">
+              <a:rPr lang="en-US" sz="1350" dirty="0">
                 <a:solidFill>
                   <a:srgbClr val="E6EDF2"/>
                 </a:solidFill>
@@ -36416,14 +36518,14 @@
               </a:rPr>
               <a:t>    li   a0, 0</a:t>
             </a:r>
-            <a:endParaRPr lang="en-US" sz="1150" dirty="0"/>
+            <a:endParaRPr lang="en-US" sz="1350" dirty="0"/>
           </a:p>
           <a:p>
             <a:pPr indent="0" marL="0">
               <a:buNone/>
             </a:pPr>
             <a:r>
-              <a:rPr lang="en-US" sz="1150" dirty="0">
+              <a:rPr lang="en-US" sz="1350" dirty="0">
                 <a:solidFill>
                   <a:srgbClr val="E6EDF2"/>
                 </a:solidFill>
@@ -36433,14 +36535,14 @@
               </a:rPr>
               <a:t>    li   a1, 0</a:t>
             </a:r>
-            <a:endParaRPr lang="en-US" sz="1150" dirty="0"/>
+            <a:endParaRPr lang="en-US" sz="1350" dirty="0"/>
           </a:p>
           <a:p>
             <a:pPr indent="0" marL="0">
               <a:buNone/>
             </a:pPr>
             <a:r>
-              <a:rPr lang="en-US" sz="1150" dirty="0">
+              <a:rPr lang="en-US" sz="1350" dirty="0">
                 <a:solidFill>
                   <a:srgbClr val="E6EDF2"/>
                 </a:solidFill>
@@ -36454,7 +36556,7 @@
               <a:buNone/>
             </a:pPr>
             <a:r>
-              <a:rPr lang="en-US" sz="1150" dirty="0">
+              <a:rPr lang="en-US" sz="1350" dirty="0">
                 <a:solidFill>
                   <a:srgbClr val="8FB3A0"/>
                 </a:solidFill>
@@ -36464,14 +36566,14 @@
               </a:rPr>
               <a:t># nota MIDI 76 = Mi acuto</a:t>
             </a:r>
-            <a:endParaRPr lang="en-US" sz="1150" dirty="0"/>
+            <a:endParaRPr lang="en-US" sz="1350" dirty="0"/>
           </a:p>
           <a:p>
             <a:pPr indent="0" marL="0">
               <a:buNone/>
             </a:pPr>
             <a:r>
-              <a:rPr lang="en-US" sz="1150" dirty="0">
+              <a:rPr lang="en-US" sz="1350" dirty="0">
                 <a:solidFill>
                   <a:srgbClr val="E6EDF2"/>
                 </a:solidFill>
@@ -36481,14 +36583,14 @@
               </a:rPr>
               <a:t>    li   a3, 255</a:t>
             </a:r>
-            <a:endParaRPr lang="en-US" sz="1150" dirty="0"/>
+            <a:endParaRPr lang="en-US" sz="1350" dirty="0"/>
           </a:p>
           <a:p>
             <a:pPr indent="0" marL="0">
               <a:buNone/>
             </a:pPr>
             <a:r>
-              <a:rPr lang="en-US" sz="1150" dirty="0">
+              <a:rPr lang="en-US" sz="1350" dirty="0">
                 <a:solidFill>
                   <a:srgbClr val="E6EDF2"/>
                 </a:solidFill>
@@ -36498,14 +36600,14 @@
               </a:rPr>
               <a:t>    li   a4, 40</a:t>
             </a:r>
-            <a:endParaRPr lang="en-US" sz="1150" dirty="0"/>
+            <a:endParaRPr lang="en-US" sz="1350" dirty="0"/>
           </a:p>
           <a:p>
             <a:pPr indent="0" marL="0">
               <a:buNone/>
             </a:pPr>
             <a:r>
-              <a:rPr lang="en-US" sz="1150" dirty="0">
+              <a:rPr lang="en-US" sz="1350" dirty="0">
                 <a:solidFill>
                   <a:srgbClr val="E6EDF2"/>
                 </a:solidFill>
@@ -36515,14 +36617,14 @@
               </a:rPr>
               <a:t>    call prg32_audio_note</a:t>
             </a:r>
-            <a:endParaRPr lang="en-US" sz="1150" dirty="0"/>
+            <a:endParaRPr lang="en-US" sz="1350" dirty="0"/>
           </a:p>
           <a:p>
             <a:pPr indent="0" marL="0">
               <a:buNone/>
             </a:pPr>
             <a:r>
-              <a:rPr lang="en-US" sz="1150" dirty="0">
+              <a:rPr lang="en-US" sz="1350" dirty="0">
                 <a:solidFill>
                   <a:srgbClr val="E6EDF2"/>
                 </a:solidFill>
@@ -36536,7 +36638,7 @@
               <a:buNone/>
             </a:pPr>
             <a:r>
-              <a:rPr lang="en-US" sz="1150" dirty="0">
+              <a:rPr lang="en-US" sz="1350" dirty="0">
                 <a:solidFill>
                   <a:srgbClr val="8FB3A0"/>
                 </a:solidFill>
@@ -36544,9 +36646,26 @@
                 <a:ea typeface="Courier New" pitchFamily="34" charset="-122"/>
                 <a:cs typeface="Courier New" pitchFamily="34" charset="-120"/>
               </a:rPr>
-              <a:t># al massimo un mattoncino per fotogramma</a:t>
-            </a:r>
-            <a:endParaRPr lang="en-US" sz="1150" dirty="0"/>
+              <a:t># al massimo un mattoncino per</a:t>
+            </a:r>
+            <a:endParaRPr lang="en-US" sz="1350" dirty="0"/>
+          </a:p>
+          <a:p>
+            <a:pPr indent="0" marL="0">
+              <a:buNone/>
+            </a:pPr>
+            <a:r>
+              <a:rPr lang="en-US" sz="1350" dirty="0">
+                <a:solidFill>
+                  <a:srgbClr val="E6EDF2"/>
+                </a:solidFill>
+                <a:latin typeface="Courier New" pitchFamily="34" charset="0"/>
+                <a:ea typeface="Courier New" pitchFamily="34" charset="-122"/>
+                <a:cs typeface="Courier New" pitchFamily="34" charset="-120"/>
+              </a:rPr>
+              <a:t>        fotogramma</a:t>
+            </a:r>
+            <a:endParaRPr lang="en-US" sz="1350" dirty="0"/>
           </a:p>
         </p:txBody>
       </p:sp>
